--- a/SSGI_AI_경영코치_상세기획서.pptx
+++ b/SSGI_AI_경영코치_상세기획서.pptx
@@ -16356,7 +16356,7 @@
                 </a:solidFill>
                 <a:latin typeface="Arial"/>
               </a:rPr>
-              <a:t>CAC (가설)</a:t>
+              <a:t>CAC 목표</a:t>
             </a:r>
           </a:p>
         </p:txBody>
@@ -16391,7 +16391,7 @@
                 </a:solidFill>
                 <a:latin typeface="Arial"/>
               </a:rPr>
-              <a:t>12,000원</a:t>
+              <a:t>≤ 12,000원</a:t>
             </a:r>
           </a:p>
         </p:txBody>
@@ -16427,7 +16427,7 @@
                 <a:latin typeface="맑은 고딕"/>
               </a:rPr>
               <a:t>카카오·인스타 광고 단가
-업계 평균 추정</a:t>
+베타 출시 후 측정 시작</a:t>
             </a:r>
           </a:p>
         </p:txBody>
@@ -16508,7 +16508,7 @@
                 </a:solidFill>
                 <a:latin typeface="Arial"/>
               </a:rPr>
-              <a:t>LTV (가설)</a:t>
+              <a:t>LTV 목표</a:t>
             </a:r>
           </a:p>
         </p:txBody>
@@ -16543,7 +16543,7 @@
                 </a:solidFill>
                 <a:latin typeface="Arial"/>
               </a:rPr>
-              <a:t>47,520원</a:t>
+              <a:t>≥ 36,000원</a:t>
             </a:r>
           </a:p>
         </p:txBody>
@@ -16578,8 +16578,8 @@
                 </a:solidFill>
                 <a:latin typeface="맑은 고딕"/>
               </a:rPr>
-              <a:t>단가 9,900원 × 잔존 12개월
-자체 시뮬 기반 가설</a:t>
+              <a:t>9,900원 × 잔존 3개월(보수)
+결제 모듈 출시 후 측정</a:t>
             </a:r>
           </a:p>
         </p:txBody>
@@ -16660,7 +16660,7 @@
                 </a:solidFill>
                 <a:latin typeface="Arial"/>
               </a:rPr>
-              <a:t>LTV/CAC (가설)</a:t>
+              <a:t>LTV/CAC</a:t>
             </a:r>
           </a:p>
         </p:txBody>
@@ -16695,7 +16695,7 @@
                 </a:solidFill>
                 <a:latin typeface="Arial"/>
               </a:rPr>
-              <a:t>3.96</a:t>
+              <a:t>측정 전</a:t>
             </a:r>
           </a:p>
         </p:txBody>
@@ -16730,8 +16730,8 @@
                 </a:solidFill>
                 <a:latin typeface="맑은 고딕"/>
               </a:rPr>
-              <a:t>VC 합격선 ≥ 3 충족 가설
-결제 출시 후 실측 필요</a:t>
+              <a:t>VC 합격선 ≥ 3 목표
+Year 2 데이터로 검증 예정</a:t>
             </a:r>
           </a:p>
         </p:txBody>
@@ -16812,7 +16812,7 @@
                 </a:solidFill>
                 <a:latin typeface="Arial"/>
               </a:rPr>
-              <a:t>Payback (가설)</a:t>
+              <a:t>Payback</a:t>
             </a:r>
           </a:p>
         </p:txBody>
@@ -16847,7 +16847,7 @@
                 </a:solidFill>
                 <a:latin typeface="Arial"/>
               </a:rPr>
-              <a:t>4.8개월</a:t>
+              <a:t>측정 전</a:t>
             </a:r>
           </a:p>
         </p:txBody>
@@ -16882,8 +16882,8 @@
                 </a:solidFill>
                 <a:latin typeface="맑은 고딕"/>
               </a:rPr>
-              <a:t>12개월 내 회수 가능 가설
-실측 데이터 0</a:t>
+              <a:t>결제 모듈 미출시
+베타 후 코호트로 측정</a:t>
             </a:r>
           </a:p>
         </p:txBody>
@@ -20185,7 +20185,7 @@
                 </a:solidFill>
                 <a:latin typeface="Arial"/>
               </a:rPr>
-              <a:t>13 · 검증·QA</a:t>
+              <a:t>13 · 자체 시뮬·점검</a:t>
             </a:r>
           </a:p>
         </p:txBody>
@@ -20220,7 +20220,7 @@
                 </a:solidFill>
                 <a:latin typeface="맑은 고딕"/>
               </a:rPr>
-              <a:t>300+ 페르소나 × 3 라운드 멀티 시각 QA — 자체 검증</a:t>
+              <a:t>정적 코드 분석 + 페르소나 시뮬 3 라운드 — 실 사용자 외부 검증은 베타 단계</a:t>
             </a:r>
           </a:p>
         </p:txBody>
@@ -20290,7 +20290,7 @@
                 </a:solidFill>
                 <a:latin typeface="맑은 고딕"/>
               </a:rPr>
-              <a:t>🔍 검증 규모 — 산출물 11건 (총 4,200줄, 각 라운드별 마크다운)</a:t>
+              <a:t>🔍 점검 규모 — 산출물 11건 (총 4,200줄) · 실 사용자 인터뷰 0명 (베타 출시 후 진행 예정)</a:t>
             </a:r>
           </a:p>
         </p:txBody>
@@ -20450,7 +20450,7 @@
                 </a:solidFill>
                 <a:latin typeface="맑은 고딕"/>
               </a:rPr>
-              <a:t>토대</a:t>
+              <a:t>토대 점검</a:t>
             </a:r>
           </a:p>
         </p:txBody>
@@ -20485,7 +20485,7 @@
                 </a:solidFill>
                 <a:latin typeface="맑은 고딕"/>
               </a:rPr>
-              <a:t>▸ PRIORITY-VERIFY.md (P1+P2 핫픽스 검증, 24s→0.25s)</a:t>
+              <a:t>▸ PRIORITY-VERIFY: 핫픽스 24s→0.25s (라이브 로그 실측)</a:t>
             </a:r>
           </a:p>
         </p:txBody>
@@ -20520,7 +20520,7 @@
                 </a:solidFill>
                 <a:latin typeface="맑은 고딕"/>
               </a:rPr>
-              <a:t>▸ DATA-AUTHENTICITY.md (8 RED FLAGS 추적)</a:t>
+              <a:t>▸ DATA-AUTHENTICITY: 8 RED FLAGS 코드 추적</a:t>
             </a:r>
           </a:p>
         </p:txBody>
@@ -20555,7 +20555,7 @@
                 </a:solidFill>
                 <a:latin typeface="맑은 고딕"/>
               </a:rPr>
-              <a:t>▸ PERSONAS.md (300 페르소나 + 5 투자자 + 5 기술전문가)</a:t>
+              <a:t>▸ PERSONAS: 300명 매트릭스 시뮬 (실 인터뷰 X)</a:t>
             </a:r>
           </a:p>
         </p:txBody>
@@ -20715,7 +20715,7 @@
                 </a:solidFill>
                 <a:latin typeface="맑은 고딕"/>
               </a:rPr>
-              <a:t>페이지별 QA</a:t>
+              <a:t>페이지별 시뮬 점검</a:t>
             </a:r>
           </a:p>
         </p:txBody>
@@ -20750,7 +20750,7 @@
                 </a:solidFill>
                 <a:latin typeface="맑은 고딕"/>
               </a:rPr>
-              <a:t>▸ QA-PART-A: Auth Flow (랜딩·콜백·온보딩)</a:t>
+              <a:t>▸ Auth/Dashboard/Insights/Subsidies 코드 정적 분석</a:t>
             </a:r>
           </a:p>
         </p:txBody>
@@ -20785,7 +20785,7 @@
                 </a:solidFill>
                 <a:latin typeface="맑은 고딕"/>
               </a:rPr>
-              <a:t>▸ QA-PART-B: Dashboard (40셀 매트릭스)</a:t>
+              <a:t>▸ 40셀 기술 매트릭스 자체 채점 (외부 평가관 X)</a:t>
             </a:r>
           </a:p>
         </p:txBody>
@@ -20820,49 +20820,14 @@
                 </a:solidFill>
                 <a:latin typeface="맑은 고딕"/>
               </a:rPr>
-              <a:t>▸ QA-PART-C: Insights (GPT 환각 핵심 분석)</a:t>
-            </a:r>
-          </a:p>
-        </p:txBody>
-      </p:sp>
-      <p:sp>
-        <p:nvSpPr>
-          <p:cNvPr id="24" name="TextBox 23"/>
-          <p:cNvSpPr txBox="1"/>
-          <p:nvPr/>
-        </p:nvSpPr>
-        <p:spPr>
-          <a:xfrm>
-            <a:off x="4553712" y="4251960"/>
-            <a:ext cx="3291840" cy="457200"/>
-          </a:xfrm>
-          <a:prstGeom prst="rect">
-            <a:avLst/>
-          </a:prstGeom>
-          <a:noFill/>
-        </p:spPr>
-        <p:txBody>
-          <a:bodyPr wrap="square" lIns="0" rIns="0" tIns="0" bIns="0" anchor="t">
-            <a:spAutoFit/>
-          </a:bodyPr>
-          <a:lstStyle/>
-          <a:p>
-            <a:pPr algn="l"/>
-            <a:r>
-              <a:rPr sz="950" b="0" i="0">
-                <a:solidFill>
-                  <a:srgbClr val="1A1A1A"/>
-                </a:solidFill>
-                <a:latin typeface="맑은 고딕"/>
-              </a:rPr>
-              <a:t>▸ QA-PART-D: Subsidies·Coupons·Offline</a:t>
-            </a:r>
-          </a:p>
-        </p:txBody>
-      </p:sp>
-      <p:sp>
-        <p:nvSpPr>
-          <p:cNvPr id="25" name="Rectangle 24"/>
+              <a:t>▸ GPT 환각 출력 필드 식별 + UI 라벨링</a:t>
+            </a:r>
+          </a:p>
+        </p:txBody>
+      </p:sp>
+      <p:sp>
+        <p:nvSpPr>
+          <p:cNvPr id="24" name="Rectangle 23"/>
           <p:cNvSpPr/>
           <p:nvPr/>
         </p:nvSpPr>
@@ -20908,7 +20873,7 @@
       </p:sp>
       <p:sp>
         <p:nvSpPr>
-          <p:cNvPr id="26" name="Rectangle 25"/>
+          <p:cNvPr id="25" name="Rectangle 24"/>
           <p:cNvSpPr/>
           <p:nvPr/>
         </p:nvSpPr>
@@ -20952,7 +20917,7 @@
       </p:sp>
       <p:sp>
         <p:nvSpPr>
-          <p:cNvPr id="27" name="TextBox 26"/>
+          <p:cNvPr id="26" name="TextBox 25"/>
           <p:cNvSpPr txBox="1"/>
           <p:nvPr/>
         </p:nvSpPr>
@@ -20987,7 +20952,7 @@
       </p:sp>
       <p:sp>
         <p:nvSpPr>
-          <p:cNvPr id="28" name="TextBox 27"/>
+          <p:cNvPr id="27" name="TextBox 26"/>
           <p:cNvSpPr txBox="1"/>
           <p:nvPr/>
         </p:nvSpPr>
@@ -21022,7 +20987,7 @@
       </p:sp>
       <p:sp>
         <p:nvSpPr>
-          <p:cNvPr id="29" name="TextBox 28"/>
+          <p:cNvPr id="28" name="TextBox 27"/>
           <p:cNvSpPr txBox="1"/>
           <p:nvPr/>
         </p:nvSpPr>
@@ -21050,14 +21015,14 @@
                 </a:solidFill>
                 <a:latin typeface="맑은 고딕"/>
               </a:rPr>
-              <a:t>▸ PERSONA-JOURNEY: 6명 D0→D28 retention 시뮬</a:t>
-            </a:r>
-          </a:p>
-        </p:txBody>
-      </p:sp>
-      <p:sp>
-        <p:nvSpPr>
-          <p:cNvPr id="30" name="TextBox 29"/>
+              <a:t>▸ 6명 7-day journey 시뮬 (실측 retention X)</a:t>
+            </a:r>
+          </a:p>
+        </p:txBody>
+      </p:sp>
+      <p:sp>
+        <p:nvSpPr>
+          <p:cNvPr id="29" name="TextBox 28"/>
           <p:cNvSpPr txBox="1"/>
           <p:nvPr/>
         </p:nvSpPr>
@@ -21085,14 +21050,14 @@
                 </a:solidFill>
                 <a:latin typeface="맑은 고딕"/>
               </a:rPr>
-              <a:t>▸ META-CROSSREF: 7 cross-cutting + 12 빠진 축</a:t>
-            </a:r>
-          </a:p>
-        </p:txBody>
-      </p:sp>
-      <p:sp>
-        <p:nvSpPr>
-          <p:cNvPr id="31" name="TextBox 30"/>
+              <a:t>▸ Meta cross-ref: 7 cross-cutting + 12 빠진 축</a:t>
+            </a:r>
+          </a:p>
+        </p:txBody>
+      </p:sp>
+      <p:sp>
+        <p:nvSpPr>
+          <p:cNvPr id="30" name="TextBox 29"/>
           <p:cNvSpPr txBox="1"/>
           <p:nvPr/>
         </p:nvSpPr>
@@ -21120,49 +21085,14 @@
                 </a:solidFill>
                 <a:latin typeface="맑은 고딕"/>
               </a:rPr>
-              <a:t>▸ EMPIRICAL: 14 P0 코드 grep 검증</a:t>
-            </a:r>
-          </a:p>
-        </p:txBody>
-      </p:sp>
-      <p:sp>
-        <p:nvSpPr>
-          <p:cNvPr id="32" name="TextBox 31"/>
-          <p:cNvSpPr txBox="1"/>
-          <p:nvPr/>
-        </p:nvSpPr>
-        <p:spPr>
-          <a:xfrm>
-            <a:off x="8375904" y="4251960"/>
-            <a:ext cx="3291840" cy="457200"/>
-          </a:xfrm>
-          <a:prstGeom prst="rect">
-            <a:avLst/>
-          </a:prstGeom>
-          <a:noFill/>
-        </p:spPr>
-        <p:txBody>
-          <a:bodyPr wrap="square" lIns="0" rIns="0" tIns="0" bIns="0" anchor="t">
-            <a:spAutoFit/>
-          </a:bodyPr>
-          <a:lstStyle/>
-          <a:p>
-            <a:pPr algn="l"/>
-            <a:r>
-              <a:rPr sz="950" b="0" i="0">
-                <a:solidFill>
-                  <a:srgbClr val="1A1A1A"/>
-                </a:solidFill>
-                <a:latin typeface="맑은 고딕"/>
-              </a:rPr>
-              <a:t>▸ FINAL-FIX-LIST: 9 P0 + 8 P1 실행 순서</a:t>
-            </a:r>
-          </a:p>
-        </p:txBody>
-      </p:sp>
-      <p:sp>
-        <p:nvSpPr>
-          <p:cNvPr id="33" name="TextBox 32"/>
+              <a:t>▸ 14 P0 코드 grep 실재 확인 + 9건 수정</a:t>
+            </a:r>
+          </a:p>
+        </p:txBody>
+      </p:sp>
+      <p:sp>
+        <p:nvSpPr>
+          <p:cNvPr id="31" name="TextBox 30"/>
           <p:cNvSpPr txBox="1"/>
           <p:nvPr/>
         </p:nvSpPr>
@@ -21190,14 +21120,14 @@
                 </a:solidFill>
                 <a:latin typeface="맑은 고딕"/>
               </a:rPr>
-              <a:t>📈 검증 성과 — fix 이전 vs 이후</a:t>
-            </a:r>
-          </a:p>
-        </p:txBody>
-      </p:sp>
-      <p:sp>
-        <p:nvSpPr>
-          <p:cNvPr id="34" name="Rectangle 33"/>
+              <a:t>📈 수정 효과 — 실측(파랑) vs 자체 시뮬(주황) 구분</a:t>
+            </a:r>
+          </a:p>
+        </p:txBody>
+      </p:sp>
+      <p:sp>
+        <p:nvSpPr>
+          <p:cNvPr id="32" name="Rectangle 31"/>
           <p:cNvSpPr/>
           <p:nvPr/>
         </p:nvSpPr>
@@ -21243,7 +21173,7 @@
       </p:sp>
       <p:sp>
         <p:nvSpPr>
-          <p:cNvPr id="35" name="TextBox 34"/>
+          <p:cNvPr id="33" name="TextBox 32"/>
           <p:cNvSpPr txBox="1"/>
           <p:nvPr/>
         </p:nvSpPr>
@@ -21271,14 +21201,14 @@
                 </a:solidFill>
                 <a:latin typeface="맑은 고딕"/>
               </a:rPr>
-              <a:t>데모 통과 확률</a:t>
-            </a:r>
-          </a:p>
-        </p:txBody>
-      </p:sp>
-      <p:sp>
-        <p:nvSpPr>
-          <p:cNvPr id="36" name="TextBox 35"/>
+              <a:t>kakao callback</a:t>
+            </a:r>
+          </a:p>
+        </p:txBody>
+      </p:sp>
+      <p:sp>
+        <p:nvSpPr>
+          <p:cNvPr id="34" name="TextBox 33"/>
           <p:cNvSpPr txBox="1"/>
           <p:nvPr/>
         </p:nvSpPr>
@@ -21306,14 +21236,14 @@
                 </a:solidFill>
                 <a:latin typeface="Arial"/>
               </a:rPr>
-              <a:t>0~10%</a:t>
-            </a:r>
-          </a:p>
-        </p:txBody>
-      </p:sp>
-      <p:sp>
-        <p:nvSpPr>
-          <p:cNvPr id="37" name="TextBox 36"/>
+              <a:t>24초 hang</a:t>
+            </a:r>
+          </a:p>
+        </p:txBody>
+      </p:sp>
+      <p:sp>
+        <p:nvSpPr>
+          <p:cNvPr id="35" name="TextBox 34"/>
           <p:cNvSpPr txBox="1"/>
           <p:nvPr/>
         </p:nvSpPr>
@@ -21341,14 +21271,14 @@
                 </a:solidFill>
                 <a:latin typeface="Arial"/>
               </a:rPr>
-              <a:t>→ 70~80%</a:t>
-            </a:r>
-          </a:p>
-        </p:txBody>
-      </p:sp>
-      <p:sp>
-        <p:nvSpPr>
-          <p:cNvPr id="38" name="TextBox 37"/>
+              <a:t>→ 0.25초</a:t>
+            </a:r>
+          </a:p>
+        </p:txBody>
+      </p:sp>
+      <p:sp>
+        <p:nvSpPr>
+          <p:cNvPr id="36" name="TextBox 35"/>
           <p:cNvSpPr txBox="1"/>
           <p:nvPr/>
         </p:nvSpPr>
@@ -21376,14 +21306,14 @@
                 </a:solidFill>
                 <a:latin typeface="맑은 고딕"/>
               </a:rPr>
-              <a:t>P0 9건 fix 후</a:t>
-            </a:r>
-          </a:p>
-        </p:txBody>
-      </p:sp>
-      <p:sp>
-        <p:nvSpPr>
-          <p:cNvPr id="39" name="Rectangle 38"/>
+              <a:t>라이브 로그 실측 ✓</a:t>
+            </a:r>
+          </a:p>
+        </p:txBody>
+      </p:sp>
+      <p:sp>
+        <p:nvSpPr>
+          <p:cNvPr id="37" name="Rectangle 36"/>
           <p:cNvSpPr/>
           <p:nvPr/>
         </p:nvSpPr>
@@ -21429,7 +21359,7 @@
       </p:sp>
       <p:sp>
         <p:nvSpPr>
-          <p:cNvPr id="40" name="TextBox 39"/>
+          <p:cNvPr id="38" name="TextBox 37"/>
           <p:cNvSpPr txBox="1"/>
           <p:nvPr/>
         </p:nvSpPr>
@@ -21457,14 +21387,14 @@
                 </a:solidFill>
                 <a:latin typeface="맑은 고딕"/>
               </a:rPr>
-              <a:t>kakao callback</a:t>
-            </a:r>
-          </a:p>
-        </p:txBody>
-      </p:sp>
-      <p:sp>
-        <p:nvSpPr>
-          <p:cNvPr id="41" name="TextBox 40"/>
+              <a:t>DB 세션 점유</a:t>
+            </a:r>
+          </a:p>
+        </p:txBody>
+      </p:sp>
+      <p:sp>
+        <p:nvSpPr>
+          <p:cNvPr id="39" name="TextBox 38"/>
           <p:cNvSpPr txBox="1"/>
           <p:nvPr/>
         </p:nvSpPr>
@@ -21492,14 +21422,14 @@
                 </a:solidFill>
                 <a:latin typeface="Arial"/>
               </a:rPr>
-              <a:t>24초 hang</a:t>
-            </a:r>
-          </a:p>
-        </p:txBody>
-      </p:sp>
-      <p:sp>
-        <p:nvSpPr>
-          <p:cNvPr id="42" name="TextBox 41"/>
+              <a:t>단일 세션</a:t>
+            </a:r>
+          </a:p>
+        </p:txBody>
+      </p:sp>
+      <p:sp>
+        <p:nvSpPr>
+          <p:cNvPr id="40" name="TextBox 39"/>
           <p:cNvSpPr txBox="1"/>
           <p:nvPr/>
         </p:nvSpPr>
@@ -21527,14 +21457,14 @@
                 </a:solidFill>
                 <a:latin typeface="Arial"/>
               </a:rPr>
-              <a:t>→ 0.25초</a:t>
-            </a:r>
-          </a:p>
-        </p:txBody>
-      </p:sp>
-      <p:sp>
-        <p:nvSpPr>
-          <p:cNvPr id="43" name="TextBox 42"/>
+              <a:t>→ phased 4 라우트</a:t>
+            </a:r>
+          </a:p>
+        </p:txBody>
+      </p:sp>
+      <p:sp>
+        <p:nvSpPr>
+          <p:cNvPr id="41" name="TextBox 40"/>
           <p:cNvSpPr txBox="1"/>
           <p:nvPr/>
         </p:nvSpPr>
@@ -21562,14 +21492,14 @@
                 </a:solidFill>
                 <a:latin typeface="맑은 고딕"/>
               </a:rPr>
-              <a:t>phased pattern</a:t>
-            </a:r>
-          </a:p>
-        </p:txBody>
-      </p:sp>
-      <p:sp>
-        <p:nvSpPr>
-          <p:cNvPr id="44" name="Rectangle 43"/>
+              <a:t>코드 변경 실측 ✓</a:t>
+            </a:r>
+          </a:p>
+        </p:txBody>
+      </p:sp>
+      <p:sp>
+        <p:nvSpPr>
+          <p:cNvPr id="42" name="Rectangle 41"/>
           <p:cNvSpPr/>
           <p:nvPr/>
         </p:nvSpPr>
@@ -21615,7 +21545,7 @@
       </p:sp>
       <p:sp>
         <p:nvSpPr>
-          <p:cNvPr id="45" name="TextBox 44"/>
+          <p:cNvPr id="43" name="TextBox 42"/>
           <p:cNvSpPr txBox="1"/>
           <p:nvPr/>
         </p:nvSpPr>
@@ -21643,14 +21573,14 @@
                 </a:solidFill>
                 <a:latin typeface="맑은 고딕"/>
               </a:rPr>
-              <a:t>DB 풀 점유</a:t>
-            </a:r>
-          </a:p>
-        </p:txBody>
-      </p:sp>
-      <p:sp>
-        <p:nvSpPr>
-          <p:cNvPr id="46" name="TextBox 45"/>
+              <a:t>기술 매트릭스 자체채점</a:t>
+            </a:r>
+          </a:p>
+        </p:txBody>
+      </p:sp>
+      <p:sp>
+        <p:nvSpPr>
+          <p:cNvPr id="44" name="TextBox 43"/>
           <p:cNvSpPr txBox="1"/>
           <p:nvPr/>
         </p:nvSpPr>
@@ -21678,14 +21608,14 @@
                 </a:solidFill>
                 <a:latin typeface="Arial"/>
               </a:rPr>
-              <a:t>10명에서 고갈</a:t>
-            </a:r>
-          </a:p>
-        </p:txBody>
-      </p:sp>
-      <p:sp>
-        <p:nvSpPr>
-          <p:cNvPr id="47" name="TextBox 46"/>
+              <a:t>15%</a:t>
+            </a:r>
+          </a:p>
+        </p:txBody>
+      </p:sp>
+      <p:sp>
+        <p:nvSpPr>
+          <p:cNvPr id="45" name="TextBox 44"/>
           <p:cNvSpPr txBox="1"/>
           <p:nvPr/>
         </p:nvSpPr>
@@ -21709,18 +21639,18 @@
             <a:r>
               <a:rPr sz="1400" b="1" i="0">
                 <a:solidFill>
-                  <a:srgbClr val="0F4C3A"/>
+                  <a:srgbClr val="9A6700"/>
                 </a:solidFill>
                 <a:latin typeface="Arial"/>
               </a:rPr>
-              <a:t>→ 30명+ 동시 OK</a:t>
-            </a:r>
-          </a:p>
-        </p:txBody>
-      </p:sp>
-      <p:sp>
-        <p:nvSpPr>
-          <p:cNvPr id="48" name="TextBox 47"/>
+              <a:t>→ 60%+</a:t>
+            </a:r>
+          </a:p>
+        </p:txBody>
+      </p:sp>
+      <p:sp>
+        <p:nvSpPr>
+          <p:cNvPr id="46" name="TextBox 45"/>
           <p:cNvSpPr txBox="1"/>
           <p:nvPr/>
         </p:nvSpPr>
@@ -21748,14 +21678,14 @@
                 </a:solidFill>
                 <a:latin typeface="맑은 고딕"/>
               </a:rPr>
-              <a:t>async session 분리</a:t>
-            </a:r>
-          </a:p>
-        </p:txBody>
-      </p:sp>
-      <p:sp>
-        <p:nvSpPr>
-          <p:cNvPr id="49" name="Rectangle 48"/>
+              <a:t>자체 채점 (외부 평가 X)</a:t>
+            </a:r>
+          </a:p>
+        </p:txBody>
+      </p:sp>
+      <p:sp>
+        <p:nvSpPr>
+          <p:cNvPr id="47" name="Rectangle 46"/>
           <p:cNvSpPr/>
           <p:nvPr/>
         </p:nvSpPr>
@@ -21801,7 +21731,7 @@
       </p:sp>
       <p:sp>
         <p:nvSpPr>
-          <p:cNvPr id="50" name="TextBox 49"/>
+          <p:cNvPr id="48" name="TextBox 47"/>
           <p:cNvSpPr txBox="1"/>
           <p:nvPr/>
         </p:nvSpPr>
@@ -21829,14 +21759,14 @@
                 </a:solidFill>
                 <a:latin typeface="맑은 고딕"/>
               </a:rPr>
-              <a:t>기술 매트릭스 합격률</a:t>
-            </a:r>
-          </a:p>
-        </p:txBody>
-      </p:sp>
-      <p:sp>
-        <p:nvSpPr>
-          <p:cNvPr id="51" name="TextBox 50"/>
+              <a:t>데모 통과 확률</a:t>
+            </a:r>
+          </a:p>
+        </p:txBody>
+      </p:sp>
+      <p:sp>
+        <p:nvSpPr>
+          <p:cNvPr id="49" name="TextBox 48"/>
           <p:cNvSpPr txBox="1"/>
           <p:nvPr/>
         </p:nvSpPr>
@@ -21864,14 +21794,14 @@
                 </a:solidFill>
                 <a:latin typeface="Arial"/>
               </a:rPr>
-              <a:t>15%</a:t>
-            </a:r>
-          </a:p>
-        </p:txBody>
-      </p:sp>
-      <p:sp>
-        <p:nvSpPr>
-          <p:cNvPr id="52" name="TextBox 51"/>
+              <a:t>0~10%</a:t>
+            </a:r>
+          </a:p>
+        </p:txBody>
+      </p:sp>
+      <p:sp>
+        <p:nvSpPr>
+          <p:cNvPr id="50" name="TextBox 49"/>
           <p:cNvSpPr txBox="1"/>
           <p:nvPr/>
         </p:nvSpPr>
@@ -21895,18 +21825,18 @@
             <a:r>
               <a:rPr sz="1400" b="1" i="0">
                 <a:solidFill>
-                  <a:srgbClr val="0F4C3A"/>
+                  <a:srgbClr val="9A6700"/>
                 </a:solidFill>
                 <a:latin typeface="Arial"/>
               </a:rPr>
-              <a:t>→ 60%+</a:t>
-            </a:r>
-          </a:p>
-        </p:txBody>
-      </p:sp>
-      <p:sp>
-        <p:nvSpPr>
-          <p:cNvPr id="53" name="TextBox 52"/>
+              <a:t>→ 70~80%</a:t>
+            </a:r>
+          </a:p>
+        </p:txBody>
+      </p:sp>
+      <p:sp>
+        <p:nvSpPr>
+          <p:cNvPr id="51" name="TextBox 50"/>
           <p:cNvSpPr txBox="1"/>
           <p:nvPr/>
         </p:nvSpPr>
@@ -21934,7 +21864,7 @@
                 </a:solidFill>
                 <a:latin typeface="맑은 고딕"/>
               </a:rPr>
-              <a:t>보안·UI/UX·AI 보강</a:t>
+              <a:t>자체 추정 (실 응모 X)</a:t>
             </a:r>
           </a:p>
         </p:txBody>
@@ -25891,7 +25821,7 @@
                 </a:solidFill>
                 <a:latin typeface="맑은 고딕"/>
               </a:rPr>
-              <a:t>·  Kahneman, D. &amp; Tversky, A. (1979). Prospect Theory — 손실 프레이밍 ADR 001 근거</a:t>
+              <a:t>·  Kahneman, D. &amp; Tversky, A. (1979). Prospect Theory: An Analysis of Decision under Risk. Econometrica 47(2). — 손실 프레이밍 ADR 001 근거</a:t>
             </a:r>
           </a:p>
         </p:txBody>
@@ -25926,7 +25856,7 @@
                 </a:solidFill>
                 <a:latin typeface="맑은 고딕"/>
               </a:rPr>
-              <a:t>·  Sweeney, L. (2002). k-Anonymity — 사회적 증거 임계값 ADR 002 근거</a:t>
+              <a:t>·  Tversky, A. &amp; Kahneman, D. (1981). The Framing of Decisions and the Psychology of Choice. Science 211. — 프레이밍 효과 보강</a:t>
             </a:r>
           </a:p>
         </p:txBody>
@@ -25961,7 +25891,7 @@
                 </a:solidFill>
                 <a:latin typeface="맑은 고딕"/>
               </a:rPr>
-              <a:t>·  Lewis et al. (2020). Retrieval-Augmented Generation for Knowledge-Intensive NLP — RAG 원형</a:t>
+              <a:t>·  Sweeney, L. (2002). k-Anonymity: A Model for Protecting Privacy. Int. J. Uncertainty Fuzziness Knowl.-Based Syst. 10(5). — ADR 002 근거</a:t>
             </a:r>
           </a:p>
         </p:txBody>
@@ -25996,7 +25926,7 @@
                 </a:solidFill>
                 <a:latin typeface="맑은 고딕"/>
               </a:rPr>
-              <a:t>·  Beck, K. (2023). Tidy First? — 점진적 리팩터링 (phased pattern 영향)</a:t>
+              <a:t>·  Cialdini, R. B. (2006). Influence: The Psychology of Persuasion. — 사회적 증거 원리 보강</a:t>
             </a:r>
           </a:p>
         </p:txBody>
@@ -26031,7 +25961,7 @@
                 </a:solidFill>
                 <a:latin typeface="맑은 고딕"/>
               </a:rPr>
-              <a:t>·  서울 열린데이터광장 (2025). VwsmTrdarIxQq 상권변화지수 4분기 — 실측 통계</a:t>
+              <a:t>·  서울 열린데이터광장 (2025). VwsmTrdarIxQq 상권변화지수 2025 4분기 — 실측 통계 (4.5년 / 9.8년 출처)</a:t>
             </a:r>
           </a:p>
         </p:txBody>
@@ -26292,309 +26222,99 @@
         </p:nvSpPr>
         <p:spPr>
           <a:xfrm>
-            <a:off x="1371600" y="5349240"/>
-            <a:ext cx="10058400" cy="365760"/>
-          </a:xfrm>
-          <a:prstGeom prst="rect">
-            <a:avLst/>
-          </a:prstGeom>
-          <a:noFill/>
-        </p:spPr>
-        <p:txBody>
-          <a:bodyPr wrap="square" lIns="0" rIns="0" tIns="0" bIns="0" anchor="t">
-            <a:spAutoFit/>
-          </a:bodyPr>
-          <a:lstStyle/>
-          <a:p>
-            <a:pPr algn="l"/>
-            <a:r>
-              <a:rPr sz="1100" b="1" i="0">
+            <a:off x="1371600" y="5394960"/>
+            <a:ext cx="10058400" cy="457200"/>
+          </a:xfrm>
+          <a:prstGeom prst="rect">
+            <a:avLst/>
+          </a:prstGeom>
+          <a:noFill/>
+        </p:spPr>
+        <p:txBody>
+          <a:bodyPr wrap="square" lIns="0" rIns="0" tIns="0" bIns="0" anchor="t">
+            <a:spAutoFit/>
+          </a:bodyPr>
+          <a:lstStyle/>
+          <a:p>
+            <a:pPr algn="l"/>
+            <a:r>
+              <a:rPr sz="1500" b="0" i="1">
                 <a:solidFill>
                   <a:srgbClr val="FEE500"/>
                 </a:solidFill>
+                <a:latin typeface="맑은 고딕"/>
+              </a:rPr>
+              <a:t>한 명의 사장님이라도 폐업의 절벽에서 한 발 물러서게 할 수 있다면,</a:t>
+            </a:r>
+          </a:p>
+        </p:txBody>
+      </p:sp>
+      <p:sp>
+        <p:nvSpPr>
+          <p:cNvPr id="9" name="TextBox 8"/>
+          <p:cNvSpPr txBox="1"/>
+          <p:nvPr/>
+        </p:nvSpPr>
+        <p:spPr>
+          <a:xfrm>
+            <a:off x="1371600" y="5852160"/>
+            <a:ext cx="10058400" cy="457200"/>
+          </a:xfrm>
+          <a:prstGeom prst="rect">
+            <a:avLst/>
+          </a:prstGeom>
+          <a:noFill/>
+        </p:spPr>
+        <p:txBody>
+          <a:bodyPr wrap="square" lIns="0" rIns="0" tIns="0" bIns="0" anchor="t">
+            <a:spAutoFit/>
+          </a:bodyPr>
+          <a:lstStyle/>
+          <a:p>
+            <a:pPr algn="l"/>
+            <a:r>
+              <a:rPr sz="1500" b="0" i="1">
+                <a:solidFill>
+                  <a:srgbClr val="FEE500"/>
+                </a:solidFill>
+                <a:latin typeface="맑은 고딕"/>
+              </a:rPr>
+              <a:t>이 시스템은 그것만으로 충분합니다.</a:t>
+            </a:r>
+          </a:p>
+        </p:txBody>
+      </p:sp>
+      <p:sp>
+        <p:nvSpPr>
+          <p:cNvPr id="10" name="TextBox 9"/>
+          <p:cNvSpPr txBox="1"/>
+          <p:nvPr/>
+        </p:nvSpPr>
+        <p:spPr>
+          <a:xfrm>
+            <a:off x="1371600" y="6446520"/>
+            <a:ext cx="10058400" cy="274320"/>
+          </a:xfrm>
+          <a:prstGeom prst="rect">
+            <a:avLst/>
+          </a:prstGeom>
+          <a:noFill/>
+        </p:spPr>
+        <p:txBody>
+          <a:bodyPr wrap="square" lIns="0" rIns="0" tIns="0" bIns="0" anchor="t">
+            <a:spAutoFit/>
+          </a:bodyPr>
+          <a:lstStyle/>
+          <a:p>
+            <a:pPr algn="l"/>
+            <a:r>
+              <a:rPr sz="1000" b="0" i="0">
+                <a:solidFill>
+                  <a:srgbClr val="FFFFFF"/>
+                </a:solidFill>
                 <a:latin typeface="Arial"/>
               </a:rPr>
-              <a:t>1차 서류 자체평가 (100점 + 가점 2)</a:t>
-            </a:r>
-          </a:p>
-        </p:txBody>
-      </p:sp>
-      <p:sp>
-        <p:nvSpPr>
-          <p:cNvPr id="9" name="TextBox 8"/>
-          <p:cNvSpPr txBox="1"/>
-          <p:nvPr/>
-        </p:nvSpPr>
-        <p:spPr>
-          <a:xfrm>
-            <a:off x="1371600" y="5715000"/>
-            <a:ext cx="2286000" cy="274320"/>
-          </a:xfrm>
-          <a:prstGeom prst="rect">
-            <a:avLst/>
-          </a:prstGeom>
-          <a:noFill/>
-        </p:spPr>
-        <p:txBody>
-          <a:bodyPr wrap="square" lIns="0" rIns="0" tIns="0" bIns="0" anchor="t">
-            <a:spAutoFit/>
-          </a:bodyPr>
-          <a:lstStyle/>
-          <a:p>
-            <a:pPr algn="l"/>
-            <a:r>
-              <a:rPr sz="900" b="0" i="0">
-                <a:solidFill>
-                  <a:srgbClr val="FEE500"/>
-                </a:solidFill>
-                <a:latin typeface="맑은 고딕"/>
-              </a:rPr>
-              <a:t>앱·웹 구동·완성도</a:t>
-            </a:r>
-          </a:p>
-        </p:txBody>
-      </p:sp>
-      <p:sp>
-        <p:nvSpPr>
-          <p:cNvPr id="10" name="TextBox 9"/>
-          <p:cNvSpPr txBox="1"/>
-          <p:nvPr/>
-        </p:nvSpPr>
-        <p:spPr>
-          <a:xfrm>
-            <a:off x="1371600" y="5943600"/>
-            <a:ext cx="2286000" cy="411480"/>
-          </a:xfrm>
-          <a:prstGeom prst="rect">
-            <a:avLst/>
-          </a:prstGeom>
-          <a:noFill/>
-        </p:spPr>
-        <p:txBody>
-          <a:bodyPr wrap="square" lIns="0" rIns="0" tIns="0" bIns="0" anchor="t">
-            <a:spAutoFit/>
-          </a:bodyPr>
-          <a:lstStyle/>
-          <a:p>
-            <a:pPr algn="l"/>
-            <a:r>
-              <a:rPr sz="2200" b="1" i="0">
-                <a:solidFill>
-                  <a:srgbClr val="FFFFFF"/>
-                </a:solidFill>
-                <a:latin typeface="Arial"/>
-              </a:rPr>
-              <a:t>55/60</a:t>
-            </a:r>
-          </a:p>
-        </p:txBody>
-      </p:sp>
-      <p:sp>
-        <p:nvSpPr>
-          <p:cNvPr id="11" name="TextBox 10"/>
-          <p:cNvSpPr txBox="1"/>
-          <p:nvPr/>
-        </p:nvSpPr>
-        <p:spPr>
-          <a:xfrm>
-            <a:off x="3977640" y="5715000"/>
-            <a:ext cx="2286000" cy="274320"/>
-          </a:xfrm>
-          <a:prstGeom prst="rect">
-            <a:avLst/>
-          </a:prstGeom>
-          <a:noFill/>
-        </p:spPr>
-        <p:txBody>
-          <a:bodyPr wrap="square" lIns="0" rIns="0" tIns="0" bIns="0" anchor="t">
-            <a:spAutoFit/>
-          </a:bodyPr>
-          <a:lstStyle/>
-          <a:p>
-            <a:pPr algn="l"/>
-            <a:r>
-              <a:rPr sz="900" b="0" i="0">
-                <a:solidFill>
-                  <a:srgbClr val="FEE500"/>
-                </a:solidFill>
-                <a:latin typeface="맑은 고딕"/>
-              </a:rPr>
-              <a:t>상세기획서 완성도</a:t>
-            </a:r>
-          </a:p>
-        </p:txBody>
-      </p:sp>
-      <p:sp>
-        <p:nvSpPr>
-          <p:cNvPr id="12" name="TextBox 11"/>
-          <p:cNvSpPr txBox="1"/>
-          <p:nvPr/>
-        </p:nvSpPr>
-        <p:spPr>
-          <a:xfrm>
-            <a:off x="3977640" y="5943600"/>
-            <a:ext cx="2286000" cy="411480"/>
-          </a:xfrm>
-          <a:prstGeom prst="rect">
-            <a:avLst/>
-          </a:prstGeom>
-          <a:noFill/>
-        </p:spPr>
-        <p:txBody>
-          <a:bodyPr wrap="square" lIns="0" rIns="0" tIns="0" bIns="0" anchor="t">
-            <a:spAutoFit/>
-          </a:bodyPr>
-          <a:lstStyle/>
-          <a:p>
-            <a:pPr algn="l"/>
-            <a:r>
-              <a:rPr sz="2200" b="1" i="0">
-                <a:solidFill>
-                  <a:srgbClr val="FFFFFF"/>
-                </a:solidFill>
-                <a:latin typeface="Arial"/>
-              </a:rPr>
-              <a:t>37/40</a:t>
-            </a:r>
-          </a:p>
-        </p:txBody>
-      </p:sp>
-      <p:sp>
-        <p:nvSpPr>
-          <p:cNvPr id="13" name="TextBox 12"/>
-          <p:cNvSpPr txBox="1"/>
-          <p:nvPr/>
-        </p:nvSpPr>
-        <p:spPr>
-          <a:xfrm>
-            <a:off x="6583680" y="5715000"/>
-            <a:ext cx="2286000" cy="274320"/>
-          </a:xfrm>
-          <a:prstGeom prst="rect">
-            <a:avLst/>
-          </a:prstGeom>
-          <a:noFill/>
-        </p:spPr>
-        <p:txBody>
-          <a:bodyPr wrap="square" lIns="0" rIns="0" tIns="0" bIns="0" anchor="t">
-            <a:spAutoFit/>
-          </a:bodyPr>
-          <a:lstStyle/>
-          <a:p>
-            <a:pPr algn="l"/>
-            <a:r>
-              <a:rPr sz="900" b="0" i="0">
-                <a:solidFill>
-                  <a:srgbClr val="FEE500"/>
-                </a:solidFill>
-                <a:latin typeface="맑은 고딕"/>
-              </a:rPr>
-              <a:t>결합 가점</a:t>
-            </a:r>
-          </a:p>
-        </p:txBody>
-      </p:sp>
-      <p:sp>
-        <p:nvSpPr>
-          <p:cNvPr id="14" name="TextBox 13"/>
-          <p:cNvSpPr txBox="1"/>
-          <p:nvPr/>
-        </p:nvSpPr>
-        <p:spPr>
-          <a:xfrm>
-            <a:off x="6583680" y="5943600"/>
-            <a:ext cx="2286000" cy="411480"/>
-          </a:xfrm>
-          <a:prstGeom prst="rect">
-            <a:avLst/>
-          </a:prstGeom>
-          <a:noFill/>
-        </p:spPr>
-        <p:txBody>
-          <a:bodyPr wrap="square" lIns="0" rIns="0" tIns="0" bIns="0" anchor="t">
-            <a:spAutoFit/>
-          </a:bodyPr>
-          <a:lstStyle/>
-          <a:p>
-            <a:pPr algn="l"/>
-            <a:r>
-              <a:rPr sz="2200" b="1" i="0">
-                <a:solidFill>
-                  <a:srgbClr val="FFFFFF"/>
-                </a:solidFill>
-                <a:latin typeface="Arial"/>
-              </a:rPr>
-              <a:t>2/2</a:t>
-            </a:r>
-          </a:p>
-        </p:txBody>
-      </p:sp>
-      <p:sp>
-        <p:nvSpPr>
-          <p:cNvPr id="15" name="TextBox 14"/>
-          <p:cNvSpPr txBox="1"/>
-          <p:nvPr/>
-        </p:nvSpPr>
-        <p:spPr>
-          <a:xfrm>
-            <a:off x="9189720" y="5715000"/>
-            <a:ext cx="2286000" cy="274320"/>
-          </a:xfrm>
-          <a:prstGeom prst="rect">
-            <a:avLst/>
-          </a:prstGeom>
-          <a:noFill/>
-        </p:spPr>
-        <p:txBody>
-          <a:bodyPr wrap="square" lIns="0" rIns="0" tIns="0" bIns="0" anchor="t">
-            <a:spAutoFit/>
-          </a:bodyPr>
-          <a:lstStyle/>
-          <a:p>
-            <a:pPr algn="l"/>
-            <a:r>
-              <a:rPr sz="900" b="0" i="0">
-                <a:solidFill>
-                  <a:srgbClr val="FEE500"/>
-                </a:solidFill>
-                <a:latin typeface="맑은 고딕"/>
-              </a:rPr>
-              <a:t>총점 추정</a:t>
-            </a:r>
-          </a:p>
-        </p:txBody>
-      </p:sp>
-      <p:sp>
-        <p:nvSpPr>
-          <p:cNvPr id="16" name="TextBox 15"/>
-          <p:cNvSpPr txBox="1"/>
-          <p:nvPr/>
-        </p:nvSpPr>
-        <p:spPr>
-          <a:xfrm>
-            <a:off x="9189720" y="5943600"/>
-            <a:ext cx="2286000" cy="411480"/>
-          </a:xfrm>
-          <a:prstGeom prst="rect">
-            <a:avLst/>
-          </a:prstGeom>
-          <a:noFill/>
-        </p:spPr>
-        <p:txBody>
-          <a:bodyPr wrap="square" lIns="0" rIns="0" tIns="0" bIns="0" anchor="t">
-            <a:spAutoFit/>
-          </a:bodyPr>
-          <a:lstStyle/>
-          <a:p>
-            <a:pPr algn="l"/>
-            <a:r>
-              <a:rPr sz="2200" b="1" i="0">
-                <a:solidFill>
-                  <a:srgbClr val="FFFFFF"/>
-                </a:solidFill>
-                <a:latin typeface="Arial"/>
-              </a:rPr>
-              <a:t>94/102</a:t>
+              <a:t>TEAM SSGI · 정수현 · 구혁모 · 나은민 · 이준수 · 2026</a:t>
             </a:r>
           </a:p>
         </p:txBody>
@@ -27955,7 +27675,7 @@
                 </a:solidFill>
                 <a:latin typeface="Arial"/>
               </a:rPr>
-              <a:t>P. 03.5 / 20</a:t>
+              <a:t>P. 04 / 21</a:t>
             </a:r>
           </a:p>
         </p:txBody>
@@ -28096,8 +27816,8 @@
                 <a:latin typeface="맑은 고딕"/>
               </a:rPr>
               <a:t>관악구에서 7년째 문구점을 운영합니다.
-옆 학교 학생이 줄었지만 매일 가게 문 열기 바빠
-내 가게 매출이 위험한지 알 방법이 없었습니다.</a:t>
+매출이 매달 조금씩 빠지는데, 어느 정도가
+진짜 위험한 건지 알 방법이 없었습니다.</a:t>
             </a:r>
           </a:p>
         </p:txBody>
@@ -28132,7 +27852,7 @@
                 </a:solidFill>
                 <a:latin typeface="맑은 고딕"/>
               </a:rPr>
-              <a:t>— P020, 58세, 관악구 문구점, 페르소나 매트릭스 클러스터 C08 (폐업위험)</a:t>
+              <a:t>— P020, 58세, 관악구 문구점 페르소나 (8축 매트릭스 시뮬, 실 사용자 인터뷰 X)</a:t>
             </a:r>
           </a:p>
         </p:txBody>
@@ -28316,8 +28036,8 @@
                 </a:solidFill>
                 <a:latin typeface="맑은 고딕"/>
               </a:rPr>
-              <a:t>같은 동네 한식 8곳이
-평균 4.5년에 폐업했어요</a:t>
+              <a:t>서울 폐업 평균 4.5년 vs
+운영중 9.8년 — 위치 측정</a:t>
             </a:r>
           </a:p>
         </p:txBody>
@@ -28396,7 +28116,7 @@
                 </a:solidFill>
                 <a:latin typeface="Arial"/>
               </a:rPr>
-              <a:t>출처 표기</a:t>
+              <a:t>매출 변화</a:t>
             </a:r>
           </a:p>
         </p:txBody>
@@ -28431,8 +28151,8 @@
                 </a:solidFill>
                 <a:latin typeface="맑은 고딕"/>
               </a:rPr>
-              <a:t>'서울 VwsmTrdarIxQq · 2025 4분기'
-사장님이 출처를 직접 확인할 수 있게</a:t>
+              <a:t>VwsmTrdarSelngQq 분기 QoQ
++ 객단가·시간대·연령대 비중</a:t>
             </a:r>
           </a:p>
         </p:txBody>
@@ -28546,8 +28266,8 @@
                 </a:solidFill>
                 <a:latin typeface="맑은 고딕"/>
               </a:rPr>
-              <a:t>'이번 주 단골 SMS + 재방문 쿠폰
-1종 즉시 배포'</a:t>
+              <a:t>'이번 주 단골 SMS +
+재방문 쿠폰 1종 즉시 배포'</a:t>
             </a:r>
           </a:p>
         </p:txBody>

--- a/SSGI_AI_경영코치_상세기획서.pptx
+++ b/SSGI_AI_경영코치_상세기획서.pptx
@@ -5585,8 +5585,8 @@
                 </a:solidFill>
                 <a:latin typeface="맑은 고딕"/>
               </a:rPr>
-              <a:t>ChromaDB RAG + ICP rerank
-→ 매칭 사유 칩 + D-day</a:t>
+              <a:t>SQL target_regions + ICP rerank
+(ChromaDB 인덱싱 보조) → D-day 칩</a:t>
             </a:r>
           </a:p>
         </p:txBody>
@@ -10230,7 +10230,7 @@
                 </a:solidFill>
                 <a:latin typeface="맑은 고딕"/>
               </a:rPr>
-              <a:t>대시보드 + 폐업 매트릭스 — 정직성 우선 UI</a:t>
+              <a:t>대시보드 UI — 폐업 매트릭스 결정론이 화면에 닿는 방식</a:t>
             </a:r>
           </a:p>
         </p:txBody>
@@ -19094,7 +19094,7 @@
                 </a:solidFill>
                 <a:latin typeface="맑은 고딕"/>
               </a:rPr>
-              <a:t>환경</a:t>
+              <a:t>환경 (정량)</a:t>
             </a:r>
           </a:p>
         </p:txBody>
@@ -19129,7 +19129,7 @@
                 </a:solidFill>
                 <a:latin typeface="맑은 고딕"/>
               </a:rPr>
-              <a:t>✓ 디지털 페이퍼리스 — 보조금 신청서 PDF 자동 생성</a:t>
+              <a:t>✓ 페이퍼리스: 1만 사용자 × 12장 × 연 3회 = 36만장 ≈ 1.8t 종이 ≈ 14.4 tCO2eq/년</a:t>
             </a:r>
           </a:p>
         </p:txBody>
@@ -19164,7 +19164,7 @@
                 </a:solidFill>
                 <a:latin typeface="맑은 고딕"/>
               </a:rPr>
-              <a:t>✓ POP·전단지 인쇄 → QR 쿠폰 전환 가이드 (탄소 절감)</a:t>
+              <a:t>✓ POP·전단지 → QR 전환: 가게당 월 50장 × 12개월 × 1만 = 600만장 ≈ 240 tCO2eq</a:t>
             </a:r>
           </a:p>
         </p:txBody>
@@ -19199,7 +19199,7 @@
                 </a:solidFill>
                 <a:latin typeface="맑은 고딕"/>
               </a:rPr>
-              <a:t>✓ PWA 캐싱 — 데이터 트래픽 최소화</a:t>
+              <a:t>✓ 행정복지센터 이동 절감: 1.2km × 3회 × 1만명 ≈ 7.6 tCO2eq/년</a:t>
             </a:r>
           </a:p>
         </p:txBody>
@@ -19234,7 +19234,7 @@
                 </a:solidFill>
                 <a:latin typeface="맑은 고딕"/>
               </a:rPr>
-              <a:t>✓ GPT 호출 캐시 (주간) — AI 연산 에너지 절약</a:t>
+              <a:t>✓ PWA 캐싱·GPT 주간 캐시 — 트래픽·연산 에너지 절약 (정량화는 베타 측정)</a:t>
             </a:r>
           </a:p>
         </p:txBody>
@@ -19429,7 +19429,7 @@
                 </a:solidFill>
                 <a:latin typeface="맑은 고딕"/>
               </a:rPr>
-              <a:t>사회</a:t>
+              <a:t>사회 (정량 추정)</a:t>
             </a:r>
           </a:p>
         </p:txBody>
@@ -19464,7 +19464,7 @@
                 </a:solidFill>
                 <a:latin typeface="맑은 고딕"/>
               </a:rPr>
-              <a:t>✓ 정보 비대칭 해소 — 시니어 사장님이 보조금 정보 접근</a:t>
+              <a:t>✓ 폐업 방지 추정: 활성 2,500명 × 손실프레이밍 효과 7~15%p = 연 23~49명</a:t>
             </a:r>
           </a:p>
         </p:txBody>
@@ -19499,7 +19499,7 @@
                 </a:solidFill>
                 <a:latin typeface="맑은 고딕"/>
               </a:rPr>
-              <a:t>✓ 폐업 사전 경보로 자영업 생존율 기여</a:t>
+              <a:t>✓   근거: 서울 자영업 폐업률 13.2% × Tversky-Kahneman 손실회피 1.5~2.5x</a:t>
             </a:r>
           </a:p>
         </p:txBody>
@@ -19534,7 +19534,7 @@
                 </a:solidFill>
                 <a:latin typeface="맑은 고딕"/>
               </a:rPr>
-              <a:t>✓ k-anonymity (k≥10) 개인정보 보호</a:t>
+              <a:t>✓ 정보 비대칭 해소 — 시니어 사장님이 보조금 정보 접근</a:t>
             </a:r>
           </a:p>
         </p:txBody>
@@ -19569,7 +19569,7 @@
                 </a:solidFill>
                 <a:latin typeface="맑은 고딕"/>
               </a:rPr>
-              <a:t>✓ 자살예방상담 1393 안내 (폐업위험 시니어 트리거)</a:t>
+              <a:t>✓ k-anonymity (k≥10) 개인정보 보호 + 자살예방상담 1393 분기 안내</a:t>
             </a:r>
           </a:p>
         </p:txBody>
@@ -19604,7 +19604,7 @@
                 </a:solidFill>
                 <a:latin typeface="맑은 고딕"/>
               </a:rPr>
-              <a:t>✓ 한국 시니어 UX (text-xs 14px, 4단계 등급)</a:t>
+              <a:t>✓ 한국 시니어 UX (text-xs 14px, 4단계 등급, 정중 톤 분기)</a:t>
             </a:r>
           </a:p>
         </p:txBody>
@@ -19834,7 +19834,7 @@
                 </a:solidFill>
                 <a:latin typeface="맑은 고딕"/>
               </a:rPr>
-              <a:t>✓ ADR (Architecture Decision Records) 6건 명시</a:t>
+              <a:t>✓ ADR 6건 명시 (손실프레이밍·k=10·하루1액션·Kakao&gt;FCM·Chroma·JWT 30일)</a:t>
             </a:r>
           </a:p>
         </p:txBody>
@@ -19869,7 +19869,7 @@
                 </a:solidFill>
                 <a:latin typeface="맑은 고딕"/>
               </a:rPr>
-              <a:t>✓ QA 라운드 3회 멀티 페르소나 검증</a:t>
+              <a:t>✓ QA 라운드 3회 + 5-패널 다중 검토 (실 사용자 인터뷰 0명, 베타 후 진행)</a:t>
             </a:r>
           </a:p>
         </p:txBody>
@@ -19904,7 +19904,7 @@
                 </a:solidFill>
                 <a:latin typeface="맑은 고딕"/>
               </a:rPr>
-              <a:t>✓ 데이터 출처 라벨 의무 (모든 화면)</a:t>
+              <a:t>✓ 데이터 출처 라벨 의무 (모든 화면 fine-print)</a:t>
             </a:r>
           </a:p>
         </p:txBody>
@@ -19939,7 +19939,7 @@
                 </a:solidFill>
                 <a:latin typeface="맑은 고딕"/>
               </a:rPr>
-              <a:t>✓ AI 추정치 자동 라벨 (_disclosure 메타필드)</a:t>
+              <a:t>✓ AI 추정치 자동 라벨 (_disclosure.ai_estimated_fields 메타필드)</a:t>
             </a:r>
           </a:p>
         </p:txBody>
@@ -22194,7 +22194,7 @@
         <p:spPr>
           <a:xfrm>
             <a:off x="1051560" y="1691640"/>
-            <a:ext cx="3657600" cy="274320"/>
+            <a:ext cx="3108960" cy="274320"/>
           </a:xfrm>
           <a:prstGeom prst="rect">
             <a:avLst/>
@@ -22222,7 +22222,86 @@
       </p:sp>
       <p:sp>
         <p:nvSpPr>
-          <p:cNvPr id="11" name="TextBox 10"/>
+          <p:cNvPr id="11" name="Rectangle 10"/>
+          <p:cNvSpPr/>
+          <p:nvPr/>
+        </p:nvSpPr>
+        <p:spPr>
+          <a:xfrm>
+            <a:off x="4160520" y="1709928"/>
+            <a:ext cx="777240" cy="219456"/>
+          </a:xfrm>
+          <a:prstGeom prst="rect">
+            <a:avLst/>
+          </a:prstGeom>
+          <a:solidFill>
+            <a:srgbClr val="B91C1C"/>
+          </a:solidFill>
+          <a:ln>
+            <a:noFill/>
+          </a:ln>
+          <a:effectLst/>
+        </p:spPr>
+        <p:style>
+          <a:lnRef idx="1">
+            <a:schemeClr val="accent1"/>
+          </a:lnRef>
+          <a:fillRef idx="3">
+            <a:schemeClr val="accent1"/>
+          </a:fillRef>
+          <a:effectRef idx="2">
+            <a:schemeClr val="accent1"/>
+          </a:effectRef>
+          <a:fontRef idx="minor">
+            <a:schemeClr val="lt1"/>
+          </a:fontRef>
+        </p:style>
+        <p:txBody>
+          <a:bodyPr rtlCol="0" anchor="ctr"/>
+          <a:lstStyle/>
+          <a:p>
+            <a:pPr algn="ctr"/>
+          </a:p>
+        </p:txBody>
+      </p:sp>
+      <p:sp>
+        <p:nvSpPr>
+          <p:cNvPr id="12" name="TextBox 11"/>
+          <p:cNvSpPr txBox="1"/>
+          <p:nvPr/>
+        </p:nvSpPr>
+        <p:spPr>
+          <a:xfrm>
+            <a:off x="4160520" y="1728216"/>
+            <a:ext cx="777240" cy="201168"/>
+          </a:xfrm>
+          <a:prstGeom prst="rect">
+            <a:avLst/>
+          </a:prstGeom>
+          <a:noFill/>
+        </p:spPr>
+        <p:txBody>
+          <a:bodyPr wrap="square" lIns="0" rIns="0" tIns="0" bIns="0" anchor="t">
+            <a:spAutoFit/>
+          </a:bodyPr>
+          <a:lstStyle/>
+          <a:p>
+            <a:pPr algn="ctr"/>
+            <a:r>
+              <a:rPr sz="800" b="1" i="0">
+                <a:solidFill>
+                  <a:srgbClr val="FFFFFF"/>
+                </a:solidFill>
+                <a:latin typeface="Arial"/>
+              </a:rPr>
+              <a:t>공공25</a:t>
+            </a:r>
+          </a:p>
+        </p:txBody>
+      </p:sp>
+      <p:sp>
+        <p:nvSpPr>
+          <p:cNvPr id="13" name="TextBox 12"/>
           <p:cNvSpPr txBox="1"/>
           <p:nvPr/>
         </p:nvSpPr>
@@ -22257,7 +22336,7 @@
       </p:sp>
       <p:sp>
         <p:nvSpPr>
-          <p:cNvPr id="12" name="TextBox 11"/>
+          <p:cNvPr id="14" name="TextBox 13"/>
           <p:cNvSpPr txBox="1"/>
           <p:nvPr/>
         </p:nvSpPr>
@@ -22292,7 +22371,7 @@
       </p:sp>
       <p:sp>
         <p:nvSpPr>
-          <p:cNvPr id="13" name="TextBox 12"/>
+          <p:cNvPr id="15" name="TextBox 14"/>
           <p:cNvSpPr txBox="1"/>
           <p:nvPr/>
         </p:nvSpPr>
@@ -22327,14 +22406,14 @@
       </p:sp>
       <p:sp>
         <p:nvSpPr>
-          <p:cNvPr id="14" name="TextBox 13"/>
+          <p:cNvPr id="16" name="TextBox 15"/>
           <p:cNvSpPr txBox="1"/>
           <p:nvPr/>
         </p:nvSpPr>
         <p:spPr>
           <a:xfrm>
             <a:off x="1051560" y="2258568"/>
-            <a:ext cx="3657600" cy="274320"/>
+            <a:ext cx="3108960" cy="274320"/>
           </a:xfrm>
           <a:prstGeom prst="rect">
             <a:avLst/>
@@ -22362,7 +22441,86 @@
       </p:sp>
       <p:sp>
         <p:nvSpPr>
-          <p:cNvPr id="15" name="TextBox 14"/>
+          <p:cNvPr id="17" name="Rectangle 16"/>
+          <p:cNvSpPr/>
+          <p:nvPr/>
+        </p:nvSpPr>
+        <p:spPr>
+          <a:xfrm>
+            <a:off x="4160520" y="2276856"/>
+            <a:ext cx="777240" cy="219456"/>
+          </a:xfrm>
+          <a:prstGeom prst="rect">
+            <a:avLst/>
+          </a:prstGeom>
+          <a:solidFill>
+            <a:srgbClr val="0F4C3A"/>
+          </a:solidFill>
+          <a:ln>
+            <a:noFill/>
+          </a:ln>
+          <a:effectLst/>
+        </p:spPr>
+        <p:style>
+          <a:lnRef idx="1">
+            <a:schemeClr val="accent1"/>
+          </a:lnRef>
+          <a:fillRef idx="3">
+            <a:schemeClr val="accent1"/>
+          </a:fillRef>
+          <a:effectRef idx="2">
+            <a:schemeClr val="accent1"/>
+          </a:effectRef>
+          <a:fontRef idx="minor">
+            <a:schemeClr val="lt1"/>
+          </a:fontRef>
+        </p:style>
+        <p:txBody>
+          <a:bodyPr rtlCol="0" anchor="ctr"/>
+          <a:lstStyle/>
+          <a:p>
+            <a:pPr algn="ctr"/>
+          </a:p>
+        </p:txBody>
+      </p:sp>
+      <p:sp>
+        <p:nvSpPr>
+          <p:cNvPr id="18" name="TextBox 17"/>
+          <p:cNvSpPr txBox="1"/>
+          <p:nvPr/>
+        </p:nvSpPr>
+        <p:spPr>
+          <a:xfrm>
+            <a:off x="4160520" y="2295144"/>
+            <a:ext cx="777240" cy="201168"/>
+          </a:xfrm>
+          <a:prstGeom prst="rect">
+            <a:avLst/>
+          </a:prstGeom>
+          <a:noFill/>
+        </p:spPr>
+        <p:txBody>
+          <a:bodyPr wrap="square" lIns="0" rIns="0" tIns="0" bIns="0" anchor="t">
+            <a:spAutoFit/>
+          </a:bodyPr>
+          <a:lstStyle/>
+          <a:p>
+            <a:pPr algn="ctr"/>
+            <a:r>
+              <a:rPr sz="800" b="1" i="0">
+                <a:solidFill>
+                  <a:srgbClr val="FFFFFF"/>
+                </a:solidFill>
+                <a:latin typeface="Arial"/>
+              </a:rPr>
+              <a:t>독창15</a:t>
+            </a:r>
+          </a:p>
+        </p:txBody>
+      </p:sp>
+      <p:sp>
+        <p:nvSpPr>
+          <p:cNvPr id="19" name="TextBox 18"/>
           <p:cNvSpPr txBox="1"/>
           <p:nvPr/>
         </p:nvSpPr>
@@ -22397,7 +22555,7 @@
       </p:sp>
       <p:sp>
         <p:nvSpPr>
-          <p:cNvPr id="16" name="TextBox 15"/>
+          <p:cNvPr id="20" name="TextBox 19"/>
           <p:cNvSpPr txBox="1"/>
           <p:nvPr/>
         </p:nvSpPr>
@@ -22432,7 +22590,7 @@
       </p:sp>
       <p:sp>
         <p:nvSpPr>
-          <p:cNvPr id="17" name="TextBox 16"/>
+          <p:cNvPr id="21" name="TextBox 20"/>
           <p:cNvSpPr txBox="1"/>
           <p:nvPr/>
         </p:nvSpPr>
@@ -22467,14 +22625,14 @@
       </p:sp>
       <p:sp>
         <p:nvSpPr>
-          <p:cNvPr id="18" name="TextBox 17"/>
+          <p:cNvPr id="22" name="TextBox 21"/>
           <p:cNvSpPr txBox="1"/>
           <p:nvPr/>
         </p:nvSpPr>
         <p:spPr>
           <a:xfrm>
             <a:off x="1051560" y="2825496"/>
-            <a:ext cx="3657600" cy="274320"/>
+            <a:ext cx="3108960" cy="274320"/>
           </a:xfrm>
           <a:prstGeom prst="rect">
             <a:avLst/>
@@ -22502,7 +22660,86 @@
       </p:sp>
       <p:sp>
         <p:nvSpPr>
-          <p:cNvPr id="19" name="TextBox 18"/>
+          <p:cNvPr id="23" name="Rectangle 22"/>
+          <p:cNvSpPr/>
+          <p:nvPr/>
+        </p:nvSpPr>
+        <p:spPr>
+          <a:xfrm>
+            <a:off x="4160520" y="2843784"/>
+            <a:ext cx="777240" cy="219456"/>
+          </a:xfrm>
+          <a:prstGeom prst="rect">
+            <a:avLst/>
+          </a:prstGeom>
+          <a:solidFill>
+            <a:srgbClr val="1A1A1A"/>
+          </a:solidFill>
+          <a:ln>
+            <a:noFill/>
+          </a:ln>
+          <a:effectLst/>
+        </p:spPr>
+        <p:style>
+          <a:lnRef idx="1">
+            <a:schemeClr val="accent1"/>
+          </a:lnRef>
+          <a:fillRef idx="3">
+            <a:schemeClr val="accent1"/>
+          </a:fillRef>
+          <a:effectRef idx="2">
+            <a:schemeClr val="accent1"/>
+          </a:effectRef>
+          <a:fontRef idx="minor">
+            <a:schemeClr val="lt1"/>
+          </a:fontRef>
+        </p:style>
+        <p:txBody>
+          <a:bodyPr rtlCol="0" anchor="ctr"/>
+          <a:lstStyle/>
+          <a:p>
+            <a:pPr algn="ctr"/>
+          </a:p>
+        </p:txBody>
+      </p:sp>
+      <p:sp>
+        <p:nvSpPr>
+          <p:cNvPr id="24" name="TextBox 23"/>
+          <p:cNvSpPr txBox="1"/>
+          <p:nvPr/>
+        </p:nvSpPr>
+        <p:spPr>
+          <a:xfrm>
+            <a:off x="4160520" y="2862072"/>
+            <a:ext cx="777240" cy="201168"/>
+          </a:xfrm>
+          <a:prstGeom prst="rect">
+            <a:avLst/>
+          </a:prstGeom>
+          <a:noFill/>
+        </p:spPr>
+        <p:txBody>
+          <a:bodyPr wrap="square" lIns="0" rIns="0" tIns="0" bIns="0" anchor="t">
+            <a:spAutoFit/>
+          </a:bodyPr>
+          <a:lstStyle/>
+          <a:p>
+            <a:pPr algn="ctr"/>
+            <a:r>
+              <a:rPr sz="800" b="1" i="0">
+                <a:solidFill>
+                  <a:srgbClr val="FFFFFF"/>
+                </a:solidFill>
+                <a:latin typeface="Arial"/>
+              </a:rPr>
+              <a:t>완성15</a:t>
+            </a:r>
+          </a:p>
+        </p:txBody>
+      </p:sp>
+      <p:sp>
+        <p:nvSpPr>
+          <p:cNvPr id="25" name="TextBox 24"/>
           <p:cNvSpPr txBox="1"/>
           <p:nvPr/>
         </p:nvSpPr>
@@ -22537,7 +22774,7 @@
       </p:sp>
       <p:sp>
         <p:nvSpPr>
-          <p:cNvPr id="20" name="TextBox 19"/>
+          <p:cNvPr id="26" name="TextBox 25"/>
           <p:cNvSpPr txBox="1"/>
           <p:nvPr/>
         </p:nvSpPr>
@@ -22572,7 +22809,7 @@
       </p:sp>
       <p:sp>
         <p:nvSpPr>
-          <p:cNvPr id="21" name="TextBox 20"/>
+          <p:cNvPr id="27" name="TextBox 26"/>
           <p:cNvSpPr txBox="1"/>
           <p:nvPr/>
         </p:nvSpPr>
@@ -22607,14 +22844,14 @@
       </p:sp>
       <p:sp>
         <p:nvSpPr>
-          <p:cNvPr id="22" name="TextBox 21"/>
+          <p:cNvPr id="28" name="TextBox 27"/>
           <p:cNvSpPr txBox="1"/>
           <p:nvPr/>
         </p:nvSpPr>
         <p:spPr>
           <a:xfrm>
             <a:off x="1051560" y="3392424"/>
-            <a:ext cx="3657600" cy="274320"/>
+            <a:ext cx="3108960" cy="274320"/>
           </a:xfrm>
           <a:prstGeom prst="rect">
             <a:avLst/>
@@ -22642,7 +22879,86 @@
       </p:sp>
       <p:sp>
         <p:nvSpPr>
-          <p:cNvPr id="23" name="TextBox 22"/>
+          <p:cNvPr id="29" name="Rectangle 28"/>
+          <p:cNvSpPr/>
+          <p:nvPr/>
+        </p:nvSpPr>
+        <p:spPr>
+          <a:xfrm>
+            <a:off x="4160520" y="3410712"/>
+            <a:ext cx="777240" cy="219456"/>
+          </a:xfrm>
+          <a:prstGeom prst="rect">
+            <a:avLst/>
+          </a:prstGeom>
+          <a:solidFill>
+            <a:srgbClr val="0F4C3A"/>
+          </a:solidFill>
+          <a:ln>
+            <a:noFill/>
+          </a:ln>
+          <a:effectLst/>
+        </p:spPr>
+        <p:style>
+          <a:lnRef idx="1">
+            <a:schemeClr val="accent1"/>
+          </a:lnRef>
+          <a:fillRef idx="3">
+            <a:schemeClr val="accent1"/>
+          </a:fillRef>
+          <a:effectRef idx="2">
+            <a:schemeClr val="accent1"/>
+          </a:effectRef>
+          <a:fontRef idx="minor">
+            <a:schemeClr val="lt1"/>
+          </a:fontRef>
+        </p:style>
+        <p:txBody>
+          <a:bodyPr rtlCol="0" anchor="ctr"/>
+          <a:lstStyle/>
+          <a:p>
+            <a:pPr algn="ctr"/>
+          </a:p>
+        </p:txBody>
+      </p:sp>
+      <p:sp>
+        <p:nvSpPr>
+          <p:cNvPr id="30" name="TextBox 29"/>
+          <p:cNvSpPr txBox="1"/>
+          <p:nvPr/>
+        </p:nvSpPr>
+        <p:spPr>
+          <a:xfrm>
+            <a:off x="4160520" y="3429000"/>
+            <a:ext cx="777240" cy="201168"/>
+          </a:xfrm>
+          <a:prstGeom prst="rect">
+            <a:avLst/>
+          </a:prstGeom>
+          <a:noFill/>
+        </p:spPr>
+        <p:txBody>
+          <a:bodyPr wrap="square" lIns="0" rIns="0" tIns="0" bIns="0" anchor="t">
+            <a:spAutoFit/>
+          </a:bodyPr>
+          <a:lstStyle/>
+          <a:p>
+            <a:pPr algn="ctr"/>
+            <a:r>
+              <a:rPr sz="800" b="1" i="0">
+                <a:solidFill>
+                  <a:srgbClr val="FFFFFF"/>
+                </a:solidFill>
+                <a:latin typeface="Arial"/>
+              </a:rPr>
+              <a:t>독창15</a:t>
+            </a:r>
+          </a:p>
+        </p:txBody>
+      </p:sp>
+      <p:sp>
+        <p:nvSpPr>
+          <p:cNvPr id="31" name="TextBox 30"/>
           <p:cNvSpPr txBox="1"/>
           <p:nvPr/>
         </p:nvSpPr>
@@ -22677,7 +22993,7 @@
       </p:sp>
       <p:sp>
         <p:nvSpPr>
-          <p:cNvPr id="24" name="TextBox 23"/>
+          <p:cNvPr id="32" name="TextBox 31"/>
           <p:cNvSpPr txBox="1"/>
           <p:nvPr/>
         </p:nvSpPr>
@@ -22712,7 +23028,7 @@
       </p:sp>
       <p:sp>
         <p:nvSpPr>
-          <p:cNvPr id="25" name="TextBox 24"/>
+          <p:cNvPr id="33" name="TextBox 32"/>
           <p:cNvSpPr txBox="1"/>
           <p:nvPr/>
         </p:nvSpPr>
@@ -22747,14 +23063,14 @@
       </p:sp>
       <p:sp>
         <p:nvSpPr>
-          <p:cNvPr id="26" name="TextBox 25"/>
+          <p:cNvPr id="34" name="TextBox 33"/>
           <p:cNvSpPr txBox="1"/>
           <p:nvPr/>
         </p:nvSpPr>
         <p:spPr>
           <a:xfrm>
             <a:off x="1051560" y="3959352"/>
-            <a:ext cx="3657600" cy="274320"/>
+            <a:ext cx="3108960" cy="274320"/>
           </a:xfrm>
           <a:prstGeom prst="rect">
             <a:avLst/>
@@ -22782,7 +23098,86 @@
       </p:sp>
       <p:sp>
         <p:nvSpPr>
-          <p:cNvPr id="27" name="TextBox 26"/>
+          <p:cNvPr id="35" name="Rectangle 34"/>
+          <p:cNvSpPr/>
+          <p:nvPr/>
+        </p:nvSpPr>
+        <p:spPr>
+          <a:xfrm>
+            <a:off x="4160520" y="3977640"/>
+            <a:ext cx="777240" cy="219456"/>
+          </a:xfrm>
+          <a:prstGeom prst="rect">
+            <a:avLst/>
+          </a:prstGeom>
+          <a:solidFill>
+            <a:srgbClr val="B91C1C"/>
+          </a:solidFill>
+          <a:ln>
+            <a:noFill/>
+          </a:ln>
+          <a:effectLst/>
+        </p:spPr>
+        <p:style>
+          <a:lnRef idx="1">
+            <a:schemeClr val="accent1"/>
+          </a:lnRef>
+          <a:fillRef idx="3">
+            <a:schemeClr val="accent1"/>
+          </a:fillRef>
+          <a:effectRef idx="2">
+            <a:schemeClr val="accent1"/>
+          </a:effectRef>
+          <a:fontRef idx="minor">
+            <a:schemeClr val="lt1"/>
+          </a:fontRef>
+        </p:style>
+        <p:txBody>
+          <a:bodyPr rtlCol="0" anchor="ctr"/>
+          <a:lstStyle/>
+          <a:p>
+            <a:pPr algn="ctr"/>
+          </a:p>
+        </p:txBody>
+      </p:sp>
+      <p:sp>
+        <p:nvSpPr>
+          <p:cNvPr id="36" name="TextBox 35"/>
+          <p:cNvSpPr txBox="1"/>
+          <p:nvPr/>
+        </p:nvSpPr>
+        <p:spPr>
+          <a:xfrm>
+            <a:off x="4160520" y="3995928"/>
+            <a:ext cx="777240" cy="201168"/>
+          </a:xfrm>
+          <a:prstGeom prst="rect">
+            <a:avLst/>
+          </a:prstGeom>
+          <a:noFill/>
+        </p:spPr>
+        <p:txBody>
+          <a:bodyPr wrap="square" lIns="0" rIns="0" tIns="0" bIns="0" anchor="t">
+            <a:spAutoFit/>
+          </a:bodyPr>
+          <a:lstStyle/>
+          <a:p>
+            <a:pPr algn="ctr"/>
+            <a:r>
+              <a:rPr sz="800" b="1" i="0">
+                <a:solidFill>
+                  <a:srgbClr val="FFFFFF"/>
+                </a:solidFill>
+                <a:latin typeface="Arial"/>
+              </a:rPr>
+              <a:t>공공25</a:t>
+            </a:r>
+          </a:p>
+        </p:txBody>
+      </p:sp>
+      <p:sp>
+        <p:nvSpPr>
+          <p:cNvPr id="37" name="TextBox 36"/>
           <p:cNvSpPr txBox="1"/>
           <p:nvPr/>
         </p:nvSpPr>
@@ -22810,14 +23205,14 @@
                 </a:solidFill>
                 <a:latin typeface="맑은 고딕"/>
               </a:rPr>
-              <a:t>서울 열린데이터광장 8종 + 결합 가점</a:t>
-            </a:r>
-          </a:p>
-        </p:txBody>
-      </p:sp>
-      <p:sp>
-        <p:nvSpPr>
-          <p:cNvPr id="28" name="TextBox 27"/>
+              <a:t>서울 열린데이터광장 8종 + 결합 가점 2점</a:t>
+            </a:r>
+          </a:p>
+        </p:txBody>
+      </p:sp>
+      <p:sp>
+        <p:nvSpPr>
+          <p:cNvPr id="38" name="TextBox 37"/>
           <p:cNvSpPr txBox="1"/>
           <p:nvPr/>
         </p:nvSpPr>
@@ -22852,7 +23247,7 @@
       </p:sp>
       <p:sp>
         <p:nvSpPr>
-          <p:cNvPr id="29" name="TextBox 28"/>
+          <p:cNvPr id="39" name="TextBox 38"/>
           <p:cNvSpPr txBox="1"/>
           <p:nvPr/>
         </p:nvSpPr>
@@ -22887,14 +23282,14 @@
       </p:sp>
       <p:sp>
         <p:nvSpPr>
-          <p:cNvPr id="30" name="TextBox 29"/>
+          <p:cNvPr id="40" name="TextBox 39"/>
           <p:cNvSpPr txBox="1"/>
           <p:nvPr/>
         </p:nvSpPr>
         <p:spPr>
           <a:xfrm>
             <a:off x="1051560" y="4526280"/>
-            <a:ext cx="3657600" cy="274320"/>
+            <a:ext cx="3108960" cy="274320"/>
           </a:xfrm>
           <a:prstGeom prst="rect">
             <a:avLst/>
@@ -22922,7 +23317,86 @@
       </p:sp>
       <p:sp>
         <p:nvSpPr>
-          <p:cNvPr id="31" name="TextBox 30"/>
+          <p:cNvPr id="41" name="Rectangle 40"/>
+          <p:cNvSpPr/>
+          <p:nvPr/>
+        </p:nvSpPr>
+        <p:spPr>
+          <a:xfrm>
+            <a:off x="4160520" y="4544568"/>
+            <a:ext cx="777240" cy="219456"/>
+          </a:xfrm>
+          <a:prstGeom prst="rect">
+            <a:avLst/>
+          </a:prstGeom>
+          <a:solidFill>
+            <a:srgbClr val="9A6700"/>
+          </a:solidFill>
+          <a:ln>
+            <a:noFill/>
+          </a:ln>
+          <a:effectLst/>
+        </p:spPr>
+        <p:style>
+          <a:lnRef idx="1">
+            <a:schemeClr val="accent1"/>
+          </a:lnRef>
+          <a:fillRef idx="3">
+            <a:schemeClr val="accent1"/>
+          </a:fillRef>
+          <a:effectRef idx="2">
+            <a:schemeClr val="accent1"/>
+          </a:effectRef>
+          <a:fontRef idx="minor">
+            <a:schemeClr val="lt1"/>
+          </a:fontRef>
+        </p:style>
+        <p:txBody>
+          <a:bodyPr rtlCol="0" anchor="ctr"/>
+          <a:lstStyle/>
+          <a:p>
+            <a:pPr algn="ctr"/>
+          </a:p>
+        </p:txBody>
+      </p:sp>
+      <p:sp>
+        <p:nvSpPr>
+          <p:cNvPr id="42" name="TextBox 41"/>
+          <p:cNvSpPr txBox="1"/>
+          <p:nvPr/>
+        </p:nvSpPr>
+        <p:spPr>
+          <a:xfrm>
+            <a:off x="4160520" y="4562856"/>
+            <a:ext cx="777240" cy="201168"/>
+          </a:xfrm>
+          <a:prstGeom prst="rect">
+            <a:avLst/>
+          </a:prstGeom>
+          <a:noFill/>
+        </p:spPr>
+        <p:txBody>
+          <a:bodyPr wrap="square" lIns="0" rIns="0" tIns="0" bIns="0" anchor="t">
+            <a:spAutoFit/>
+          </a:bodyPr>
+          <a:lstStyle/>
+          <a:p>
+            <a:pPr algn="ctr"/>
+            <a:r>
+              <a:rPr sz="800" b="1" i="0">
+                <a:solidFill>
+                  <a:srgbClr val="FFFFFF"/>
+                </a:solidFill>
+                <a:latin typeface="Arial"/>
+              </a:rPr>
+              <a:t>AI20</a:t>
+            </a:r>
+          </a:p>
+        </p:txBody>
+      </p:sp>
+      <p:sp>
+        <p:nvSpPr>
+          <p:cNvPr id="43" name="TextBox 42"/>
           <p:cNvSpPr txBox="1"/>
           <p:nvPr/>
         </p:nvSpPr>
@@ -22950,14 +23424,14 @@
                 </a:solidFill>
                 <a:latin typeface="맑은 고딕"/>
               </a:rPr>
-              <a:t>GPT-4o + ChromaDB RAG + 결정론 룰 엔진</a:t>
-            </a:r>
-          </a:p>
-        </p:txBody>
-      </p:sp>
-      <p:sp>
-        <p:nvSpPr>
-          <p:cNvPr id="32" name="TextBox 31"/>
+              <a:t>결정론 + SQL+ICP + ChromaDB(음성) + GPT-4o</a:t>
+            </a:r>
+          </a:p>
+        </p:txBody>
+      </p:sp>
+      <p:sp>
+        <p:nvSpPr>
+          <p:cNvPr id="44" name="TextBox 43"/>
           <p:cNvSpPr txBox="1"/>
           <p:nvPr/>
         </p:nvSpPr>
@@ -22992,7 +23466,7 @@
       </p:sp>
       <p:sp>
         <p:nvSpPr>
-          <p:cNvPr id="33" name="TextBox 32"/>
+          <p:cNvPr id="45" name="TextBox 44"/>
           <p:cNvSpPr txBox="1"/>
           <p:nvPr/>
         </p:nvSpPr>
@@ -23027,14 +23501,14 @@
       </p:sp>
       <p:sp>
         <p:nvSpPr>
-          <p:cNvPr id="34" name="TextBox 33"/>
+          <p:cNvPr id="46" name="TextBox 45"/>
           <p:cNvSpPr txBox="1"/>
           <p:nvPr/>
         </p:nvSpPr>
         <p:spPr>
           <a:xfrm>
             <a:off x="1051560" y="5093208"/>
-            <a:ext cx="3657600" cy="274320"/>
+            <a:ext cx="3108960" cy="274320"/>
           </a:xfrm>
           <a:prstGeom prst="rect">
             <a:avLst/>
@@ -23062,7 +23536,86 @@
       </p:sp>
       <p:sp>
         <p:nvSpPr>
-          <p:cNvPr id="35" name="TextBox 34"/>
+          <p:cNvPr id="47" name="Rectangle 46"/>
+          <p:cNvSpPr/>
+          <p:nvPr/>
+        </p:nvSpPr>
+        <p:spPr>
+          <a:xfrm>
+            <a:off x="4160520" y="5111496"/>
+            <a:ext cx="777240" cy="219456"/>
+          </a:xfrm>
+          <a:prstGeom prst="rect">
+            <a:avLst/>
+          </a:prstGeom>
+          <a:solidFill>
+            <a:srgbClr val="9A6700"/>
+          </a:solidFill>
+          <a:ln>
+            <a:noFill/>
+          </a:ln>
+          <a:effectLst/>
+        </p:spPr>
+        <p:style>
+          <a:lnRef idx="1">
+            <a:schemeClr val="accent1"/>
+          </a:lnRef>
+          <a:fillRef idx="3">
+            <a:schemeClr val="accent1"/>
+          </a:fillRef>
+          <a:effectRef idx="2">
+            <a:schemeClr val="accent1"/>
+          </a:effectRef>
+          <a:fontRef idx="minor">
+            <a:schemeClr val="lt1"/>
+          </a:fontRef>
+        </p:style>
+        <p:txBody>
+          <a:bodyPr rtlCol="0" anchor="ctr"/>
+          <a:lstStyle/>
+          <a:p>
+            <a:pPr algn="ctr"/>
+          </a:p>
+        </p:txBody>
+      </p:sp>
+      <p:sp>
+        <p:nvSpPr>
+          <p:cNvPr id="48" name="TextBox 47"/>
+          <p:cNvSpPr txBox="1"/>
+          <p:nvPr/>
+        </p:nvSpPr>
+        <p:spPr>
+          <a:xfrm>
+            <a:off x="4160520" y="5129784"/>
+            <a:ext cx="777240" cy="201168"/>
+          </a:xfrm>
+          <a:prstGeom prst="rect">
+            <a:avLst/>
+          </a:prstGeom>
+          <a:noFill/>
+        </p:spPr>
+        <p:txBody>
+          <a:bodyPr wrap="square" lIns="0" rIns="0" tIns="0" bIns="0" anchor="t">
+            <a:spAutoFit/>
+          </a:bodyPr>
+          <a:lstStyle/>
+          <a:p>
+            <a:pPr algn="ctr"/>
+            <a:r>
+              <a:rPr sz="800" b="1" i="0">
+                <a:solidFill>
+                  <a:srgbClr val="FFFFFF"/>
+                </a:solidFill>
+                <a:latin typeface="Arial"/>
+              </a:rPr>
+              <a:t>AI20</a:t>
+            </a:r>
+          </a:p>
+        </p:txBody>
+      </p:sp>
+      <p:sp>
+        <p:nvSpPr>
+          <p:cNvPr id="49" name="TextBox 48"/>
           <p:cNvSpPr txBox="1"/>
           <p:nvPr/>
         </p:nvSpPr>
@@ -23097,7 +23650,7 @@
       </p:sp>
       <p:sp>
         <p:nvSpPr>
-          <p:cNvPr id="36" name="TextBox 35"/>
+          <p:cNvPr id="50" name="TextBox 49"/>
           <p:cNvSpPr txBox="1"/>
           <p:nvPr/>
         </p:nvSpPr>
@@ -23132,7 +23685,7 @@
       </p:sp>
       <p:sp>
         <p:nvSpPr>
-          <p:cNvPr id="37" name="TextBox 36"/>
+          <p:cNvPr id="51" name="TextBox 50"/>
           <p:cNvSpPr txBox="1"/>
           <p:nvPr/>
         </p:nvSpPr>
@@ -23167,14 +23720,14 @@
       </p:sp>
       <p:sp>
         <p:nvSpPr>
-          <p:cNvPr id="38" name="TextBox 37"/>
+          <p:cNvPr id="52" name="TextBox 51"/>
           <p:cNvSpPr txBox="1"/>
           <p:nvPr/>
         </p:nvSpPr>
         <p:spPr>
           <a:xfrm>
             <a:off x="1051560" y="5660136"/>
-            <a:ext cx="3657600" cy="274320"/>
+            <a:ext cx="3108960" cy="274320"/>
           </a:xfrm>
           <a:prstGeom prst="rect">
             <a:avLst/>
@@ -23202,7 +23755,86 @@
       </p:sp>
       <p:sp>
         <p:nvSpPr>
-          <p:cNvPr id="39" name="TextBox 38"/>
+          <p:cNvPr id="53" name="Rectangle 52"/>
+          <p:cNvSpPr/>
+          <p:nvPr/>
+        </p:nvSpPr>
+        <p:spPr>
+          <a:xfrm>
+            <a:off x="4160520" y="5678424"/>
+            <a:ext cx="777240" cy="219456"/>
+          </a:xfrm>
+          <a:prstGeom prst="rect">
+            <a:avLst/>
+          </a:prstGeom>
+          <a:solidFill>
+            <a:srgbClr val="1A1A1A"/>
+          </a:solidFill>
+          <a:ln>
+            <a:noFill/>
+          </a:ln>
+          <a:effectLst/>
+        </p:spPr>
+        <p:style>
+          <a:lnRef idx="1">
+            <a:schemeClr val="accent1"/>
+          </a:lnRef>
+          <a:fillRef idx="3">
+            <a:schemeClr val="accent1"/>
+          </a:fillRef>
+          <a:effectRef idx="2">
+            <a:schemeClr val="accent1"/>
+          </a:effectRef>
+          <a:fontRef idx="minor">
+            <a:schemeClr val="lt1"/>
+          </a:fontRef>
+        </p:style>
+        <p:txBody>
+          <a:bodyPr rtlCol="0" anchor="ctr"/>
+          <a:lstStyle/>
+          <a:p>
+            <a:pPr algn="ctr"/>
+          </a:p>
+        </p:txBody>
+      </p:sp>
+      <p:sp>
+        <p:nvSpPr>
+          <p:cNvPr id="54" name="TextBox 53"/>
+          <p:cNvSpPr txBox="1"/>
+          <p:nvPr/>
+        </p:nvSpPr>
+        <p:spPr>
+          <a:xfrm>
+            <a:off x="4160520" y="5696712"/>
+            <a:ext cx="777240" cy="201168"/>
+          </a:xfrm>
+          <a:prstGeom prst="rect">
+            <a:avLst/>
+          </a:prstGeom>
+          <a:noFill/>
+        </p:spPr>
+        <p:txBody>
+          <a:bodyPr wrap="square" lIns="0" rIns="0" tIns="0" bIns="0" anchor="t">
+            <a:spAutoFit/>
+          </a:bodyPr>
+          <a:lstStyle/>
+          <a:p>
+            <a:pPr algn="ctr"/>
+            <a:r>
+              <a:rPr sz="800" b="1" i="0">
+                <a:solidFill>
+                  <a:srgbClr val="FFFFFF"/>
+                </a:solidFill>
+                <a:latin typeface="Arial"/>
+              </a:rPr>
+              <a:t>완성15</a:t>
+            </a:r>
+          </a:p>
+        </p:txBody>
+      </p:sp>
+      <p:sp>
+        <p:nvSpPr>
+          <p:cNvPr id="55" name="TextBox 54"/>
           <p:cNvSpPr txBox="1"/>
           <p:nvPr/>
         </p:nvSpPr>
@@ -23237,7 +23869,7 @@
       </p:sp>
       <p:sp>
         <p:nvSpPr>
-          <p:cNvPr id="40" name="TextBox 39"/>
+          <p:cNvPr id="56" name="TextBox 55"/>
           <p:cNvSpPr txBox="1"/>
           <p:nvPr/>
         </p:nvSpPr>
@@ -23272,7 +23904,7 @@
       </p:sp>
       <p:sp>
         <p:nvSpPr>
-          <p:cNvPr id="41" name="TextBox 40"/>
+          <p:cNvPr id="57" name="TextBox 56"/>
           <p:cNvSpPr txBox="1"/>
           <p:nvPr/>
         </p:nvSpPr>
@@ -23307,14 +23939,14 @@
       </p:sp>
       <p:sp>
         <p:nvSpPr>
-          <p:cNvPr id="42" name="TextBox 41"/>
+          <p:cNvPr id="58" name="TextBox 57"/>
           <p:cNvSpPr txBox="1"/>
           <p:nvPr/>
         </p:nvSpPr>
         <p:spPr>
           <a:xfrm>
             <a:off x="6903720" y="1691640"/>
-            <a:ext cx="3657600" cy="274320"/>
+            <a:ext cx="3108960" cy="274320"/>
           </a:xfrm>
           <a:prstGeom prst="rect">
             <a:avLst/>
@@ -23342,7 +23974,86 @@
       </p:sp>
       <p:sp>
         <p:nvSpPr>
-          <p:cNvPr id="43" name="TextBox 42"/>
+          <p:cNvPr id="59" name="Rectangle 58"/>
+          <p:cNvSpPr/>
+          <p:nvPr/>
+        </p:nvSpPr>
+        <p:spPr>
+          <a:xfrm>
+            <a:off x="10012680" y="1709928"/>
+            <a:ext cx="777240" cy="219456"/>
+          </a:xfrm>
+          <a:prstGeom prst="rect">
+            <a:avLst/>
+          </a:prstGeom>
+          <a:solidFill>
+            <a:srgbClr val="B91C1C"/>
+          </a:solidFill>
+          <a:ln>
+            <a:noFill/>
+          </a:ln>
+          <a:effectLst/>
+        </p:spPr>
+        <p:style>
+          <a:lnRef idx="1">
+            <a:schemeClr val="accent1"/>
+          </a:lnRef>
+          <a:fillRef idx="3">
+            <a:schemeClr val="accent1"/>
+          </a:fillRef>
+          <a:effectRef idx="2">
+            <a:schemeClr val="accent1"/>
+          </a:effectRef>
+          <a:fontRef idx="minor">
+            <a:schemeClr val="lt1"/>
+          </a:fontRef>
+        </p:style>
+        <p:txBody>
+          <a:bodyPr rtlCol="0" anchor="ctr"/>
+          <a:lstStyle/>
+          <a:p>
+            <a:pPr algn="ctr"/>
+          </a:p>
+        </p:txBody>
+      </p:sp>
+      <p:sp>
+        <p:nvSpPr>
+          <p:cNvPr id="60" name="TextBox 59"/>
+          <p:cNvSpPr txBox="1"/>
+          <p:nvPr/>
+        </p:nvSpPr>
+        <p:spPr>
+          <a:xfrm>
+            <a:off x="10012680" y="1728216"/>
+            <a:ext cx="777240" cy="201168"/>
+          </a:xfrm>
+          <a:prstGeom prst="rect">
+            <a:avLst/>
+          </a:prstGeom>
+          <a:noFill/>
+        </p:spPr>
+        <p:txBody>
+          <a:bodyPr wrap="square" lIns="0" rIns="0" tIns="0" bIns="0" anchor="t">
+            <a:spAutoFit/>
+          </a:bodyPr>
+          <a:lstStyle/>
+          <a:p>
+            <a:pPr algn="ctr"/>
+            <a:r>
+              <a:rPr sz="800" b="1" i="0">
+                <a:solidFill>
+                  <a:srgbClr val="FFFFFF"/>
+                </a:solidFill>
+                <a:latin typeface="Arial"/>
+              </a:rPr>
+              <a:t>공공25</a:t>
+            </a:r>
+          </a:p>
+        </p:txBody>
+      </p:sp>
+      <p:sp>
+        <p:nvSpPr>
+          <p:cNvPr id="61" name="TextBox 60"/>
           <p:cNvSpPr txBox="1"/>
           <p:nvPr/>
         </p:nvSpPr>
@@ -23377,7 +24088,7 @@
       </p:sp>
       <p:sp>
         <p:nvSpPr>
-          <p:cNvPr id="44" name="TextBox 43"/>
+          <p:cNvPr id="62" name="TextBox 61"/>
           <p:cNvSpPr txBox="1"/>
           <p:nvPr/>
         </p:nvSpPr>
@@ -23412,7 +24123,7 @@
       </p:sp>
       <p:sp>
         <p:nvSpPr>
-          <p:cNvPr id="45" name="TextBox 44"/>
+          <p:cNvPr id="63" name="TextBox 62"/>
           <p:cNvSpPr txBox="1"/>
           <p:nvPr/>
         </p:nvSpPr>
@@ -23447,14 +24158,14 @@
       </p:sp>
       <p:sp>
         <p:nvSpPr>
-          <p:cNvPr id="46" name="TextBox 45"/>
+          <p:cNvPr id="64" name="TextBox 63"/>
           <p:cNvSpPr txBox="1"/>
           <p:nvPr/>
         </p:nvSpPr>
         <p:spPr>
           <a:xfrm>
             <a:off x="6903720" y="2258568"/>
-            <a:ext cx="3657600" cy="274320"/>
+            <a:ext cx="3108960" cy="274320"/>
           </a:xfrm>
           <a:prstGeom prst="rect">
             <a:avLst/>
@@ -23482,7 +24193,86 @@
       </p:sp>
       <p:sp>
         <p:nvSpPr>
-          <p:cNvPr id="47" name="TextBox 46"/>
+          <p:cNvPr id="65" name="Rectangle 64"/>
+          <p:cNvSpPr/>
+          <p:nvPr/>
+        </p:nvSpPr>
+        <p:spPr>
+          <a:xfrm>
+            <a:off x="10012680" y="2276856"/>
+            <a:ext cx="777240" cy="219456"/>
+          </a:xfrm>
+          <a:prstGeom prst="rect">
+            <a:avLst/>
+          </a:prstGeom>
+          <a:solidFill>
+            <a:srgbClr val="B91C1C"/>
+          </a:solidFill>
+          <a:ln>
+            <a:noFill/>
+          </a:ln>
+          <a:effectLst/>
+        </p:spPr>
+        <p:style>
+          <a:lnRef idx="1">
+            <a:schemeClr val="accent1"/>
+          </a:lnRef>
+          <a:fillRef idx="3">
+            <a:schemeClr val="accent1"/>
+          </a:fillRef>
+          <a:effectRef idx="2">
+            <a:schemeClr val="accent1"/>
+          </a:effectRef>
+          <a:fontRef idx="minor">
+            <a:schemeClr val="lt1"/>
+          </a:fontRef>
+        </p:style>
+        <p:txBody>
+          <a:bodyPr rtlCol="0" anchor="ctr"/>
+          <a:lstStyle/>
+          <a:p>
+            <a:pPr algn="ctr"/>
+          </a:p>
+        </p:txBody>
+      </p:sp>
+      <p:sp>
+        <p:nvSpPr>
+          <p:cNvPr id="66" name="TextBox 65"/>
+          <p:cNvSpPr txBox="1"/>
+          <p:nvPr/>
+        </p:nvSpPr>
+        <p:spPr>
+          <a:xfrm>
+            <a:off x="10012680" y="2295144"/>
+            <a:ext cx="777240" cy="201168"/>
+          </a:xfrm>
+          <a:prstGeom prst="rect">
+            <a:avLst/>
+          </a:prstGeom>
+          <a:noFill/>
+        </p:spPr>
+        <p:txBody>
+          <a:bodyPr wrap="square" lIns="0" rIns="0" tIns="0" bIns="0" anchor="t">
+            <a:spAutoFit/>
+          </a:bodyPr>
+          <a:lstStyle/>
+          <a:p>
+            <a:pPr algn="ctr"/>
+            <a:r>
+              <a:rPr sz="800" b="1" i="0">
+                <a:solidFill>
+                  <a:srgbClr val="FFFFFF"/>
+                </a:solidFill>
+                <a:latin typeface="Arial"/>
+              </a:rPr>
+              <a:t>공공25</a:t>
+            </a:r>
+          </a:p>
+        </p:txBody>
+      </p:sp>
+      <p:sp>
+        <p:nvSpPr>
+          <p:cNvPr id="67" name="TextBox 66"/>
           <p:cNvSpPr txBox="1"/>
           <p:nvPr/>
         </p:nvSpPr>
@@ -23510,14 +24300,14 @@
                 </a:solidFill>
                 <a:latin typeface="맑은 고딕"/>
               </a:rPr>
-              <a:t>8 API × 31 routes × 8 페이지</a:t>
-            </a:r>
-          </a:p>
-        </p:txBody>
-      </p:sp>
-      <p:sp>
-        <p:nvSpPr>
-          <p:cNvPr id="48" name="TextBox 47"/>
+              <a:t>8 API × 31 routes × 8 페이지 + Phased Pattern</a:t>
+            </a:r>
+          </a:p>
+        </p:txBody>
+      </p:sp>
+      <p:sp>
+        <p:nvSpPr>
+          <p:cNvPr id="68" name="TextBox 67"/>
           <p:cNvSpPr txBox="1"/>
           <p:nvPr/>
         </p:nvSpPr>
@@ -23552,7 +24342,7 @@
       </p:sp>
       <p:sp>
         <p:nvSpPr>
-          <p:cNvPr id="49" name="TextBox 48"/>
+          <p:cNvPr id="69" name="TextBox 68"/>
           <p:cNvSpPr txBox="1"/>
           <p:nvPr/>
         </p:nvSpPr>
@@ -23587,14 +24377,14 @@
       </p:sp>
       <p:sp>
         <p:nvSpPr>
-          <p:cNvPr id="50" name="TextBox 49"/>
+          <p:cNvPr id="70" name="TextBox 69"/>
           <p:cNvSpPr txBox="1"/>
           <p:nvPr/>
         </p:nvSpPr>
         <p:spPr>
           <a:xfrm>
             <a:off x="6903720" y="2825496"/>
-            <a:ext cx="3657600" cy="274320"/>
+            <a:ext cx="3108960" cy="274320"/>
           </a:xfrm>
           <a:prstGeom prst="rect">
             <a:avLst/>
@@ -23622,7 +24412,86 @@
       </p:sp>
       <p:sp>
         <p:nvSpPr>
-          <p:cNvPr id="51" name="TextBox 50"/>
+          <p:cNvPr id="71" name="Rectangle 70"/>
+          <p:cNvSpPr/>
+          <p:nvPr/>
+        </p:nvSpPr>
+        <p:spPr>
+          <a:xfrm>
+            <a:off x="10012680" y="2843784"/>
+            <a:ext cx="777240" cy="219456"/>
+          </a:xfrm>
+          <a:prstGeom prst="rect">
+            <a:avLst/>
+          </a:prstGeom>
+          <a:solidFill>
+            <a:srgbClr val="1A1A1A"/>
+          </a:solidFill>
+          <a:ln>
+            <a:noFill/>
+          </a:ln>
+          <a:effectLst/>
+        </p:spPr>
+        <p:style>
+          <a:lnRef idx="1">
+            <a:schemeClr val="accent1"/>
+          </a:lnRef>
+          <a:fillRef idx="3">
+            <a:schemeClr val="accent1"/>
+          </a:fillRef>
+          <a:effectRef idx="2">
+            <a:schemeClr val="accent1"/>
+          </a:effectRef>
+          <a:fontRef idx="minor">
+            <a:schemeClr val="lt1"/>
+          </a:fontRef>
+        </p:style>
+        <p:txBody>
+          <a:bodyPr rtlCol="0" anchor="ctr"/>
+          <a:lstStyle/>
+          <a:p>
+            <a:pPr algn="ctr"/>
+          </a:p>
+        </p:txBody>
+      </p:sp>
+      <p:sp>
+        <p:nvSpPr>
+          <p:cNvPr id="72" name="TextBox 71"/>
+          <p:cNvSpPr txBox="1"/>
+          <p:nvPr/>
+        </p:nvSpPr>
+        <p:spPr>
+          <a:xfrm>
+            <a:off x="10012680" y="2862072"/>
+            <a:ext cx="777240" cy="201168"/>
+          </a:xfrm>
+          <a:prstGeom prst="rect">
+            <a:avLst/>
+          </a:prstGeom>
+          <a:noFill/>
+        </p:spPr>
+        <p:txBody>
+          <a:bodyPr wrap="square" lIns="0" rIns="0" tIns="0" bIns="0" anchor="t">
+            <a:spAutoFit/>
+          </a:bodyPr>
+          <a:lstStyle/>
+          <a:p>
+            <a:pPr algn="ctr"/>
+            <a:r>
+              <a:rPr sz="800" b="1" i="0">
+                <a:solidFill>
+                  <a:srgbClr val="FFFFFF"/>
+                </a:solidFill>
+                <a:latin typeface="Arial"/>
+              </a:rPr>
+              <a:t>완성15</a:t>
+            </a:r>
+          </a:p>
+        </p:txBody>
+      </p:sp>
+      <p:sp>
+        <p:nvSpPr>
+          <p:cNvPr id="73" name="TextBox 72"/>
           <p:cNvSpPr txBox="1"/>
           <p:nvPr/>
         </p:nvSpPr>
@@ -23650,14 +24519,14 @@
                 </a:solidFill>
                 <a:latin typeface="맑은 고딕"/>
               </a:rPr>
-              <a:t>대시보드 + 폐업 매트릭스</a:t>
-            </a:r>
-          </a:p>
-        </p:txBody>
-      </p:sp>
-      <p:sp>
-        <p:nvSpPr>
-          <p:cNvPr id="52" name="TextBox 51"/>
+              <a:t>대시보드 + 폐업 매트릭스 mock</a:t>
+            </a:r>
+          </a:p>
+        </p:txBody>
+      </p:sp>
+      <p:sp>
+        <p:nvSpPr>
+          <p:cNvPr id="74" name="TextBox 73"/>
           <p:cNvSpPr txBox="1"/>
           <p:nvPr/>
         </p:nvSpPr>
@@ -23692,7 +24561,7 @@
       </p:sp>
       <p:sp>
         <p:nvSpPr>
-          <p:cNvPr id="53" name="TextBox 52"/>
+          <p:cNvPr id="75" name="TextBox 74"/>
           <p:cNvSpPr txBox="1"/>
           <p:nvPr/>
         </p:nvSpPr>
@@ -23727,14 +24596,14 @@
       </p:sp>
       <p:sp>
         <p:nvSpPr>
-          <p:cNvPr id="54" name="TextBox 53"/>
+          <p:cNvPr id="76" name="TextBox 75"/>
           <p:cNvSpPr txBox="1"/>
           <p:nvPr/>
         </p:nvSpPr>
         <p:spPr>
           <a:xfrm>
             <a:off x="6903720" y="3392424"/>
-            <a:ext cx="3657600" cy="274320"/>
+            <a:ext cx="3108960" cy="274320"/>
           </a:xfrm>
           <a:prstGeom prst="rect">
             <a:avLst/>
@@ -23762,7 +24631,86 @@
       </p:sp>
       <p:sp>
         <p:nvSpPr>
-          <p:cNvPr id="55" name="TextBox 54"/>
+          <p:cNvPr id="77" name="Rectangle 76"/>
+          <p:cNvSpPr/>
+          <p:nvPr/>
+        </p:nvSpPr>
+        <p:spPr>
+          <a:xfrm>
+            <a:off x="10012680" y="3410712"/>
+            <a:ext cx="777240" cy="219456"/>
+          </a:xfrm>
+          <a:prstGeom prst="rect">
+            <a:avLst/>
+          </a:prstGeom>
+          <a:solidFill>
+            <a:srgbClr val="1A1A1A"/>
+          </a:solidFill>
+          <a:ln>
+            <a:noFill/>
+          </a:ln>
+          <a:effectLst/>
+        </p:spPr>
+        <p:style>
+          <a:lnRef idx="1">
+            <a:schemeClr val="accent1"/>
+          </a:lnRef>
+          <a:fillRef idx="3">
+            <a:schemeClr val="accent1"/>
+          </a:fillRef>
+          <a:effectRef idx="2">
+            <a:schemeClr val="accent1"/>
+          </a:effectRef>
+          <a:fontRef idx="minor">
+            <a:schemeClr val="lt1"/>
+          </a:fontRef>
+        </p:style>
+        <p:txBody>
+          <a:bodyPr rtlCol="0" anchor="ctr"/>
+          <a:lstStyle/>
+          <a:p>
+            <a:pPr algn="ctr"/>
+          </a:p>
+        </p:txBody>
+      </p:sp>
+      <p:sp>
+        <p:nvSpPr>
+          <p:cNvPr id="78" name="TextBox 77"/>
+          <p:cNvSpPr txBox="1"/>
+          <p:nvPr/>
+        </p:nvSpPr>
+        <p:spPr>
+          <a:xfrm>
+            <a:off x="10012680" y="3429000"/>
+            <a:ext cx="777240" cy="201168"/>
+          </a:xfrm>
+          <a:prstGeom prst="rect">
+            <a:avLst/>
+          </a:prstGeom>
+          <a:noFill/>
+        </p:spPr>
+        <p:txBody>
+          <a:bodyPr wrap="square" lIns="0" rIns="0" tIns="0" bIns="0" anchor="t">
+            <a:spAutoFit/>
+          </a:bodyPr>
+          <a:lstStyle/>
+          <a:p>
+            <a:pPr algn="ctr"/>
+            <a:r>
+              <a:rPr sz="800" b="1" i="0">
+                <a:solidFill>
+                  <a:srgbClr val="FFFFFF"/>
+                </a:solidFill>
+                <a:latin typeface="Arial"/>
+              </a:rPr>
+              <a:t>완성15</a:t>
+            </a:r>
+          </a:p>
+        </p:txBody>
+      </p:sp>
+      <p:sp>
+        <p:nvSpPr>
+          <p:cNvPr id="79" name="TextBox 78"/>
           <p:cNvSpPr txBox="1"/>
           <p:nvPr/>
         </p:nvSpPr>
@@ -23797,7 +24745,7 @@
       </p:sp>
       <p:sp>
         <p:nvSpPr>
-          <p:cNvPr id="56" name="TextBox 55"/>
+          <p:cNvPr id="80" name="TextBox 79"/>
           <p:cNvSpPr txBox="1"/>
           <p:nvPr/>
         </p:nvSpPr>
@@ -23832,7 +24780,7 @@
       </p:sp>
       <p:sp>
         <p:nvSpPr>
-          <p:cNvPr id="57" name="TextBox 56"/>
+          <p:cNvPr id="81" name="TextBox 80"/>
           <p:cNvSpPr txBox="1"/>
           <p:nvPr/>
         </p:nvSpPr>
@@ -23867,14 +24815,14 @@
       </p:sp>
       <p:sp>
         <p:nvSpPr>
-          <p:cNvPr id="58" name="TextBox 57"/>
+          <p:cNvPr id="82" name="TextBox 81"/>
           <p:cNvSpPr txBox="1"/>
           <p:nvPr/>
         </p:nvSpPr>
         <p:spPr>
           <a:xfrm>
             <a:off x="6903720" y="3959352"/>
-            <a:ext cx="3657600" cy="274320"/>
+            <a:ext cx="3108960" cy="274320"/>
           </a:xfrm>
           <a:prstGeom prst="rect">
             <a:avLst/>
@@ -23902,7 +24850,86 @@
       </p:sp>
       <p:sp>
         <p:nvSpPr>
-          <p:cNvPr id="59" name="TextBox 58"/>
+          <p:cNvPr id="83" name="Rectangle 82"/>
+          <p:cNvSpPr/>
+          <p:nvPr/>
+        </p:nvSpPr>
+        <p:spPr>
+          <a:xfrm>
+            <a:off x="10012680" y="3977640"/>
+            <a:ext cx="777240" cy="219456"/>
+          </a:xfrm>
+          <a:prstGeom prst="rect">
+            <a:avLst/>
+          </a:prstGeom>
+          <a:solidFill>
+            <a:srgbClr val="5A5550"/>
+          </a:solidFill>
+          <a:ln>
+            <a:noFill/>
+          </a:ln>
+          <a:effectLst/>
+        </p:spPr>
+        <p:style>
+          <a:lnRef idx="1">
+            <a:schemeClr val="accent1"/>
+          </a:lnRef>
+          <a:fillRef idx="3">
+            <a:schemeClr val="accent1"/>
+          </a:fillRef>
+          <a:effectRef idx="2">
+            <a:schemeClr val="accent1"/>
+          </a:effectRef>
+          <a:fontRef idx="minor">
+            <a:schemeClr val="lt1"/>
+          </a:fontRef>
+        </p:style>
+        <p:txBody>
+          <a:bodyPr rtlCol="0" anchor="ctr"/>
+          <a:lstStyle/>
+          <a:p>
+            <a:pPr algn="ctr"/>
+          </a:p>
+        </p:txBody>
+      </p:sp>
+      <p:sp>
+        <p:nvSpPr>
+          <p:cNvPr id="84" name="TextBox 83"/>
+          <p:cNvSpPr txBox="1"/>
+          <p:nvPr/>
+        </p:nvSpPr>
+        <p:spPr>
+          <a:xfrm>
+            <a:off x="10012680" y="3995928"/>
+            <a:ext cx="777240" cy="201168"/>
+          </a:xfrm>
+          <a:prstGeom prst="rect">
+            <a:avLst/>
+          </a:prstGeom>
+          <a:noFill/>
+        </p:spPr>
+        <p:txBody>
+          <a:bodyPr wrap="square" lIns="0" rIns="0" tIns="0" bIns="0" anchor="t">
+            <a:spAutoFit/>
+          </a:bodyPr>
+          <a:lstStyle/>
+          <a:p>
+            <a:pPr algn="ctr"/>
+            <a:r>
+              <a:rPr sz="800" b="1" i="0">
+                <a:solidFill>
+                  <a:srgbClr val="FFFFFF"/>
+                </a:solidFill>
+                <a:latin typeface="Arial"/>
+              </a:rPr>
+              <a:t>발전20</a:t>
+            </a:r>
+          </a:p>
+        </p:txBody>
+      </p:sp>
+      <p:sp>
+        <p:nvSpPr>
+          <p:cNvPr id="85" name="TextBox 84"/>
           <p:cNvSpPr txBox="1"/>
           <p:nvPr/>
         </p:nvSpPr>
@@ -23930,14 +24957,14 @@
                 </a:solidFill>
                 <a:latin typeface="맑은 고딕"/>
               </a:rPr>
-              <a:t>TAM/SAM/SOM + 단가 모델</a:t>
-            </a:r>
-          </a:p>
-        </p:txBody>
-      </p:sp>
-      <p:sp>
-        <p:nvSpPr>
-          <p:cNvPr id="60" name="TextBox 59"/>
+              <a:t>TAM/SAM/SOM bottom-up 산식</a:t>
+            </a:r>
+          </a:p>
+        </p:txBody>
+      </p:sp>
+      <p:sp>
+        <p:nvSpPr>
+          <p:cNvPr id="86" name="TextBox 85"/>
           <p:cNvSpPr txBox="1"/>
           <p:nvPr/>
         </p:nvSpPr>
@@ -23972,7 +24999,7 @@
       </p:sp>
       <p:sp>
         <p:nvSpPr>
-          <p:cNvPr id="61" name="TextBox 60"/>
+          <p:cNvPr id="87" name="TextBox 86"/>
           <p:cNvSpPr txBox="1"/>
           <p:nvPr/>
         </p:nvSpPr>
@@ -24007,14 +25034,14 @@
       </p:sp>
       <p:sp>
         <p:nvSpPr>
-          <p:cNvPr id="62" name="TextBox 61"/>
+          <p:cNvPr id="88" name="TextBox 87"/>
           <p:cNvSpPr txBox="1"/>
           <p:nvPr/>
         </p:nvSpPr>
         <p:spPr>
           <a:xfrm>
             <a:off x="6903720" y="4526280"/>
-            <a:ext cx="3657600" cy="274320"/>
+            <a:ext cx="3108960" cy="274320"/>
           </a:xfrm>
           <a:prstGeom prst="rect">
             <a:avLst/>
@@ -24042,7 +25069,86 @@
       </p:sp>
       <p:sp>
         <p:nvSpPr>
-          <p:cNvPr id="63" name="TextBox 62"/>
+          <p:cNvPr id="89" name="Rectangle 88"/>
+          <p:cNvSpPr/>
+          <p:nvPr/>
+        </p:nvSpPr>
+        <p:spPr>
+          <a:xfrm>
+            <a:off x="10012680" y="4544568"/>
+            <a:ext cx="777240" cy="219456"/>
+          </a:xfrm>
+          <a:prstGeom prst="rect">
+            <a:avLst/>
+          </a:prstGeom>
+          <a:solidFill>
+            <a:srgbClr val="5A5550"/>
+          </a:solidFill>
+          <a:ln>
+            <a:noFill/>
+          </a:ln>
+          <a:effectLst/>
+        </p:spPr>
+        <p:style>
+          <a:lnRef idx="1">
+            <a:schemeClr val="accent1"/>
+          </a:lnRef>
+          <a:fillRef idx="3">
+            <a:schemeClr val="accent1"/>
+          </a:fillRef>
+          <a:effectRef idx="2">
+            <a:schemeClr val="accent1"/>
+          </a:effectRef>
+          <a:fontRef idx="minor">
+            <a:schemeClr val="lt1"/>
+          </a:fontRef>
+        </p:style>
+        <p:txBody>
+          <a:bodyPr rtlCol="0" anchor="ctr"/>
+          <a:lstStyle/>
+          <a:p>
+            <a:pPr algn="ctr"/>
+          </a:p>
+        </p:txBody>
+      </p:sp>
+      <p:sp>
+        <p:nvSpPr>
+          <p:cNvPr id="90" name="TextBox 89"/>
+          <p:cNvSpPr txBox="1"/>
+          <p:nvPr/>
+        </p:nvSpPr>
+        <p:spPr>
+          <a:xfrm>
+            <a:off x="10012680" y="4562856"/>
+            <a:ext cx="777240" cy="201168"/>
+          </a:xfrm>
+          <a:prstGeom prst="rect">
+            <a:avLst/>
+          </a:prstGeom>
+          <a:noFill/>
+        </p:spPr>
+        <p:txBody>
+          <a:bodyPr wrap="square" lIns="0" rIns="0" tIns="0" bIns="0" anchor="t">
+            <a:spAutoFit/>
+          </a:bodyPr>
+          <a:lstStyle/>
+          <a:p>
+            <a:pPr algn="ctr"/>
+            <a:r>
+              <a:rPr sz="800" b="1" i="0">
+                <a:solidFill>
+                  <a:srgbClr val="FFFFFF"/>
+                </a:solidFill>
+                <a:latin typeface="Arial"/>
+              </a:rPr>
+              <a:t>발전20</a:t>
+            </a:r>
+          </a:p>
+        </p:txBody>
+      </p:sp>
+      <p:sp>
+        <p:nvSpPr>
+          <p:cNvPr id="91" name="TextBox 90"/>
           <p:cNvSpPr txBox="1"/>
           <p:nvPr/>
         </p:nvSpPr>
@@ -24070,14 +25176,14 @@
                 </a:solidFill>
                 <a:latin typeface="맑은 고딕"/>
               </a:rPr>
-              <a:t>Free → Pro 전환 + LTV/CAC</a:t>
-            </a:r>
-          </a:p>
-        </p:txBody>
-      </p:sp>
-      <p:sp>
-        <p:nvSpPr>
-          <p:cNvPr id="64" name="TextBox 63"/>
+              <a:t>Free → Pro 전환 + LTV/CAC 목표</a:t>
+            </a:r>
+          </a:p>
+        </p:txBody>
+      </p:sp>
+      <p:sp>
+        <p:nvSpPr>
+          <p:cNvPr id="92" name="TextBox 91"/>
           <p:cNvSpPr txBox="1"/>
           <p:nvPr/>
         </p:nvSpPr>
@@ -24112,7 +25218,7 @@
       </p:sp>
       <p:sp>
         <p:nvSpPr>
-          <p:cNvPr id="65" name="TextBox 64"/>
+          <p:cNvPr id="93" name="TextBox 92"/>
           <p:cNvSpPr txBox="1"/>
           <p:nvPr/>
         </p:nvSpPr>
@@ -24147,14 +25253,14 @@
       </p:sp>
       <p:sp>
         <p:nvSpPr>
-          <p:cNvPr id="66" name="TextBox 65"/>
+          <p:cNvPr id="94" name="TextBox 93"/>
           <p:cNvSpPr txBox="1"/>
           <p:nvPr/>
         </p:nvSpPr>
         <p:spPr>
           <a:xfrm>
             <a:off x="6903720" y="5093208"/>
-            <a:ext cx="3657600" cy="274320"/>
+            <a:ext cx="3108960" cy="274320"/>
           </a:xfrm>
           <a:prstGeom prst="rect">
             <a:avLst/>
@@ -24182,7 +25288,86 @@
       </p:sp>
       <p:sp>
         <p:nvSpPr>
-          <p:cNvPr id="67" name="TextBox 66"/>
+          <p:cNvPr id="95" name="Rectangle 94"/>
+          <p:cNvSpPr/>
+          <p:nvPr/>
+        </p:nvSpPr>
+        <p:spPr>
+          <a:xfrm>
+            <a:off x="10012680" y="5111496"/>
+            <a:ext cx="777240" cy="219456"/>
+          </a:xfrm>
+          <a:prstGeom prst="rect">
+            <a:avLst/>
+          </a:prstGeom>
+          <a:solidFill>
+            <a:srgbClr val="5A5550"/>
+          </a:solidFill>
+          <a:ln>
+            <a:noFill/>
+          </a:ln>
+          <a:effectLst/>
+        </p:spPr>
+        <p:style>
+          <a:lnRef idx="1">
+            <a:schemeClr val="accent1"/>
+          </a:lnRef>
+          <a:fillRef idx="3">
+            <a:schemeClr val="accent1"/>
+          </a:fillRef>
+          <a:effectRef idx="2">
+            <a:schemeClr val="accent1"/>
+          </a:effectRef>
+          <a:fontRef idx="minor">
+            <a:schemeClr val="lt1"/>
+          </a:fontRef>
+        </p:style>
+        <p:txBody>
+          <a:bodyPr rtlCol="0" anchor="ctr"/>
+          <a:lstStyle/>
+          <a:p>
+            <a:pPr algn="ctr"/>
+          </a:p>
+        </p:txBody>
+      </p:sp>
+      <p:sp>
+        <p:nvSpPr>
+          <p:cNvPr id="96" name="TextBox 95"/>
+          <p:cNvSpPr txBox="1"/>
+          <p:nvPr/>
+        </p:nvSpPr>
+        <p:spPr>
+          <a:xfrm>
+            <a:off x="10012680" y="5129784"/>
+            <a:ext cx="777240" cy="201168"/>
+          </a:xfrm>
+          <a:prstGeom prst="rect">
+            <a:avLst/>
+          </a:prstGeom>
+          <a:noFill/>
+        </p:spPr>
+        <p:txBody>
+          <a:bodyPr wrap="square" lIns="0" rIns="0" tIns="0" bIns="0" anchor="t">
+            <a:spAutoFit/>
+          </a:bodyPr>
+          <a:lstStyle/>
+          <a:p>
+            <a:pPr algn="ctr"/>
+            <a:r>
+              <a:rPr sz="800" b="1" i="0">
+                <a:solidFill>
+                  <a:srgbClr val="FFFFFF"/>
+                </a:solidFill>
+                <a:latin typeface="Arial"/>
+              </a:rPr>
+              <a:t>발전20</a:t>
+            </a:r>
+          </a:p>
+        </p:txBody>
+      </p:sp>
+      <p:sp>
+        <p:nvSpPr>
+          <p:cNvPr id="97" name="TextBox 96"/>
           <p:cNvSpPr txBox="1"/>
           <p:nvPr/>
         </p:nvSpPr>
@@ -24217,7 +25402,7 @@
       </p:sp>
       <p:sp>
         <p:nvSpPr>
-          <p:cNvPr id="68" name="TextBox 67"/>
+          <p:cNvPr id="98" name="TextBox 97"/>
           <p:cNvSpPr txBox="1"/>
           <p:nvPr/>
         </p:nvSpPr>
@@ -24252,7 +25437,7 @@
       </p:sp>
       <p:sp>
         <p:nvSpPr>
-          <p:cNvPr id="69" name="TextBox 68"/>
+          <p:cNvPr id="99" name="TextBox 98"/>
           <p:cNvSpPr txBox="1"/>
           <p:nvPr/>
         </p:nvSpPr>
@@ -24287,14 +25472,14 @@
       </p:sp>
       <p:sp>
         <p:nvSpPr>
-          <p:cNvPr id="70" name="TextBox 69"/>
+          <p:cNvPr id="100" name="TextBox 99"/>
           <p:cNvSpPr txBox="1"/>
           <p:nvPr/>
         </p:nvSpPr>
         <p:spPr>
           <a:xfrm>
             <a:off x="6903720" y="5660136"/>
-            <a:ext cx="3657600" cy="274320"/>
+            <a:ext cx="3108960" cy="274320"/>
           </a:xfrm>
           <a:prstGeom prst="rect">
             <a:avLst/>
@@ -24315,14 +25500,93 @@
                 </a:solidFill>
                 <a:latin typeface="맑은 고딕"/>
               </a:rPr>
-              <a:t>ESG 혁신</a:t>
-            </a:r>
-          </a:p>
-        </p:txBody>
-      </p:sp>
-      <p:sp>
-        <p:nvSpPr>
-          <p:cNvPr id="71" name="TextBox 70"/>
+              <a:t>ESG 혁신 (정량)</a:t>
+            </a:r>
+          </a:p>
+        </p:txBody>
+      </p:sp>
+      <p:sp>
+        <p:nvSpPr>
+          <p:cNvPr id="101" name="Rectangle 100"/>
+          <p:cNvSpPr/>
+          <p:nvPr/>
+        </p:nvSpPr>
+        <p:spPr>
+          <a:xfrm>
+            <a:off x="10012680" y="5678424"/>
+            <a:ext cx="777240" cy="219456"/>
+          </a:xfrm>
+          <a:prstGeom prst="rect">
+            <a:avLst/>
+          </a:prstGeom>
+          <a:solidFill>
+            <a:srgbClr val="FEE500"/>
+          </a:solidFill>
+          <a:ln>
+            <a:noFill/>
+          </a:ln>
+          <a:effectLst/>
+        </p:spPr>
+        <p:style>
+          <a:lnRef idx="1">
+            <a:schemeClr val="accent1"/>
+          </a:lnRef>
+          <a:fillRef idx="3">
+            <a:schemeClr val="accent1"/>
+          </a:fillRef>
+          <a:effectRef idx="2">
+            <a:schemeClr val="accent1"/>
+          </a:effectRef>
+          <a:fontRef idx="minor">
+            <a:schemeClr val="lt1"/>
+          </a:fontRef>
+        </p:style>
+        <p:txBody>
+          <a:bodyPr rtlCol="0" anchor="ctr"/>
+          <a:lstStyle/>
+          <a:p>
+            <a:pPr algn="ctr"/>
+          </a:p>
+        </p:txBody>
+      </p:sp>
+      <p:sp>
+        <p:nvSpPr>
+          <p:cNvPr id="102" name="TextBox 101"/>
+          <p:cNvSpPr txBox="1"/>
+          <p:nvPr/>
+        </p:nvSpPr>
+        <p:spPr>
+          <a:xfrm>
+            <a:off x="10012680" y="5696712"/>
+            <a:ext cx="777240" cy="201168"/>
+          </a:xfrm>
+          <a:prstGeom prst="rect">
+            <a:avLst/>
+          </a:prstGeom>
+          <a:noFill/>
+        </p:spPr>
+        <p:txBody>
+          <a:bodyPr wrap="square" lIns="0" rIns="0" tIns="0" bIns="0" anchor="t">
+            <a:spAutoFit/>
+          </a:bodyPr>
+          <a:lstStyle/>
+          <a:p>
+            <a:pPr algn="ctr"/>
+            <a:r>
+              <a:rPr sz="800" b="1" i="0">
+                <a:solidFill>
+                  <a:srgbClr val="1A1A1A"/>
+                </a:solidFill>
+                <a:latin typeface="Arial"/>
+              </a:rPr>
+              <a:t>ESG5</a:t>
+            </a:r>
+          </a:p>
+        </p:txBody>
+      </p:sp>
+      <p:sp>
+        <p:nvSpPr>
+          <p:cNvPr id="103" name="TextBox 102"/>
           <p:cNvSpPr txBox="1"/>
           <p:nvPr/>
         </p:nvSpPr>
@@ -24350,14 +25614,14 @@
                 </a:solidFill>
                 <a:latin typeface="맑은 고딕"/>
               </a:rPr>
-              <a:t>사회·환경·지배구조 가치 실현</a:t>
-            </a:r>
-          </a:p>
-        </p:txBody>
-      </p:sp>
-      <p:sp>
-        <p:nvSpPr>
-          <p:cNvPr id="72" name="TextBox 71"/>
+              <a:t>환경 tCO2eq + 폐업방지 23~49명/년</a:t>
+            </a:r>
+          </a:p>
+        </p:txBody>
+      </p:sp>
+      <p:sp>
+        <p:nvSpPr>
+          <p:cNvPr id="104" name="TextBox 103"/>
           <p:cNvSpPr txBox="1"/>
           <p:nvPr/>
         </p:nvSpPr>
@@ -24386,6 +25650,550 @@
                 <a:latin typeface="Arial"/>
               </a:rPr>
               <a:t>18</a:t>
+            </a:r>
+          </a:p>
+        </p:txBody>
+      </p:sp>
+      <p:cxnSp>
+        <p:nvCxnSpPr>
+          <p:cNvPr id="105" name="Connector 104"/>
+          <p:cNvCxnSpPr/>
+          <p:nvPr/>
+        </p:nvCxnSpPr>
+        <p:spPr>
+          <a:xfrm>
+            <a:off x="548640" y="6400800"/>
+            <a:ext cx="11091672" cy="0"/>
+          </a:xfrm>
+          <a:prstGeom prst="line">
+            <a:avLst/>
+          </a:prstGeom>
+          <a:ln w="9525">
+            <a:solidFill>
+              <a:srgbClr val="D4CCBE"/>
+            </a:solidFill>
+          </a:ln>
+        </p:spPr>
+        <p:style>
+          <a:lnRef idx="2">
+            <a:schemeClr val="accent1"/>
+          </a:lnRef>
+          <a:fillRef idx="0">
+            <a:schemeClr val="accent1"/>
+          </a:fillRef>
+          <a:effectRef idx="1">
+            <a:schemeClr val="accent1"/>
+          </a:effectRef>
+          <a:fontRef idx="minor">
+            <a:schemeClr val="tx1"/>
+          </a:fontRef>
+        </p:style>
+      </p:cxnSp>
+      <p:sp>
+        <p:nvSpPr>
+          <p:cNvPr id="106" name="TextBox 105"/>
+          <p:cNvSpPr txBox="1"/>
+          <p:nvPr/>
+        </p:nvSpPr>
+        <p:spPr>
+          <a:xfrm>
+            <a:off x="548640" y="6492240"/>
+            <a:ext cx="1828800" cy="274320"/>
+          </a:xfrm>
+          <a:prstGeom prst="rect">
+            <a:avLst/>
+          </a:prstGeom>
+          <a:noFill/>
+        </p:spPr>
+        <p:txBody>
+          <a:bodyPr wrap="square" lIns="0" rIns="0" tIns="0" bIns="0" anchor="t">
+            <a:spAutoFit/>
+          </a:bodyPr>
+          <a:lstStyle/>
+          <a:p>
+            <a:pPr algn="l"/>
+            <a:r>
+              <a:rPr sz="900" b="1" i="0">
+                <a:solidFill>
+                  <a:srgbClr val="1A1A1A"/>
+                </a:solidFill>
+                <a:latin typeface="맑은 고딕"/>
+              </a:rPr>
+              <a:t>평가 영역 매칭</a:t>
+            </a:r>
+          </a:p>
+        </p:txBody>
+      </p:sp>
+      <p:sp>
+        <p:nvSpPr>
+          <p:cNvPr id="107" name="Rectangle 106"/>
+          <p:cNvSpPr/>
+          <p:nvPr/>
+        </p:nvSpPr>
+        <p:spPr>
+          <a:xfrm>
+            <a:off x="2377440" y="6492240"/>
+            <a:ext cx="640080" cy="219456"/>
+          </a:xfrm>
+          <a:prstGeom prst="rect">
+            <a:avLst/>
+          </a:prstGeom>
+          <a:solidFill>
+            <a:srgbClr val="B91C1C"/>
+          </a:solidFill>
+          <a:ln>
+            <a:noFill/>
+          </a:ln>
+          <a:effectLst/>
+        </p:spPr>
+        <p:style>
+          <a:lnRef idx="1">
+            <a:schemeClr val="accent1"/>
+          </a:lnRef>
+          <a:fillRef idx="3">
+            <a:schemeClr val="accent1"/>
+          </a:fillRef>
+          <a:effectRef idx="2">
+            <a:schemeClr val="accent1"/>
+          </a:effectRef>
+          <a:fontRef idx="minor">
+            <a:schemeClr val="lt1"/>
+          </a:fontRef>
+        </p:style>
+        <p:txBody>
+          <a:bodyPr rtlCol="0" anchor="ctr"/>
+          <a:lstStyle/>
+          <a:p>
+            <a:pPr algn="ctr"/>
+          </a:p>
+        </p:txBody>
+      </p:sp>
+      <p:sp>
+        <p:nvSpPr>
+          <p:cNvPr id="108" name="TextBox 107"/>
+          <p:cNvSpPr txBox="1"/>
+          <p:nvPr/>
+        </p:nvSpPr>
+        <p:spPr>
+          <a:xfrm>
+            <a:off x="2377440" y="6510528"/>
+            <a:ext cx="640080" cy="201168"/>
+          </a:xfrm>
+          <a:prstGeom prst="rect">
+            <a:avLst/>
+          </a:prstGeom>
+          <a:noFill/>
+        </p:spPr>
+        <p:txBody>
+          <a:bodyPr wrap="square" lIns="0" rIns="0" tIns="0" bIns="0" anchor="t">
+            <a:spAutoFit/>
+          </a:bodyPr>
+          <a:lstStyle/>
+          <a:p>
+            <a:pPr algn="ctr"/>
+            <a:r>
+              <a:rPr sz="800" b="1" i="0">
+                <a:solidFill>
+                  <a:srgbClr val="FFFFFF"/>
+                </a:solidFill>
+                <a:latin typeface="Arial"/>
+              </a:rPr>
+              <a:t>공공25</a:t>
+            </a:r>
+          </a:p>
+        </p:txBody>
+      </p:sp>
+      <p:sp>
+        <p:nvSpPr>
+          <p:cNvPr id="109" name="Rectangle 108"/>
+          <p:cNvSpPr/>
+          <p:nvPr/>
+        </p:nvSpPr>
+        <p:spPr>
+          <a:xfrm>
+            <a:off x="3931920" y="6492240"/>
+            <a:ext cx="640080" cy="219456"/>
+          </a:xfrm>
+          <a:prstGeom prst="rect">
+            <a:avLst/>
+          </a:prstGeom>
+          <a:solidFill>
+            <a:srgbClr val="9A6700"/>
+          </a:solidFill>
+          <a:ln>
+            <a:noFill/>
+          </a:ln>
+          <a:effectLst/>
+        </p:spPr>
+        <p:style>
+          <a:lnRef idx="1">
+            <a:schemeClr val="accent1"/>
+          </a:lnRef>
+          <a:fillRef idx="3">
+            <a:schemeClr val="accent1"/>
+          </a:fillRef>
+          <a:effectRef idx="2">
+            <a:schemeClr val="accent1"/>
+          </a:effectRef>
+          <a:fontRef idx="minor">
+            <a:schemeClr val="lt1"/>
+          </a:fontRef>
+        </p:style>
+        <p:txBody>
+          <a:bodyPr rtlCol="0" anchor="ctr"/>
+          <a:lstStyle/>
+          <a:p>
+            <a:pPr algn="ctr"/>
+          </a:p>
+        </p:txBody>
+      </p:sp>
+      <p:sp>
+        <p:nvSpPr>
+          <p:cNvPr id="110" name="TextBox 109"/>
+          <p:cNvSpPr txBox="1"/>
+          <p:nvPr/>
+        </p:nvSpPr>
+        <p:spPr>
+          <a:xfrm>
+            <a:off x="3931920" y="6510528"/>
+            <a:ext cx="640080" cy="201168"/>
+          </a:xfrm>
+          <a:prstGeom prst="rect">
+            <a:avLst/>
+          </a:prstGeom>
+          <a:noFill/>
+        </p:spPr>
+        <p:txBody>
+          <a:bodyPr wrap="square" lIns="0" rIns="0" tIns="0" bIns="0" anchor="t">
+            <a:spAutoFit/>
+          </a:bodyPr>
+          <a:lstStyle/>
+          <a:p>
+            <a:pPr algn="ctr"/>
+            <a:r>
+              <a:rPr sz="800" b="1" i="0">
+                <a:solidFill>
+                  <a:srgbClr val="FFFFFF"/>
+                </a:solidFill>
+                <a:latin typeface="Arial"/>
+              </a:rPr>
+              <a:t>AI20</a:t>
+            </a:r>
+          </a:p>
+        </p:txBody>
+      </p:sp>
+      <p:sp>
+        <p:nvSpPr>
+          <p:cNvPr id="111" name="Rectangle 110"/>
+          <p:cNvSpPr/>
+          <p:nvPr/>
+        </p:nvSpPr>
+        <p:spPr>
+          <a:xfrm>
+            <a:off x="5486400" y="6492240"/>
+            <a:ext cx="640080" cy="219456"/>
+          </a:xfrm>
+          <a:prstGeom prst="rect">
+            <a:avLst/>
+          </a:prstGeom>
+          <a:solidFill>
+            <a:srgbClr val="0F4C3A"/>
+          </a:solidFill>
+          <a:ln>
+            <a:noFill/>
+          </a:ln>
+          <a:effectLst/>
+        </p:spPr>
+        <p:style>
+          <a:lnRef idx="1">
+            <a:schemeClr val="accent1"/>
+          </a:lnRef>
+          <a:fillRef idx="3">
+            <a:schemeClr val="accent1"/>
+          </a:fillRef>
+          <a:effectRef idx="2">
+            <a:schemeClr val="accent1"/>
+          </a:effectRef>
+          <a:fontRef idx="minor">
+            <a:schemeClr val="lt1"/>
+          </a:fontRef>
+        </p:style>
+        <p:txBody>
+          <a:bodyPr rtlCol="0" anchor="ctr"/>
+          <a:lstStyle/>
+          <a:p>
+            <a:pPr algn="ctr"/>
+          </a:p>
+        </p:txBody>
+      </p:sp>
+      <p:sp>
+        <p:nvSpPr>
+          <p:cNvPr id="112" name="TextBox 111"/>
+          <p:cNvSpPr txBox="1"/>
+          <p:nvPr/>
+        </p:nvSpPr>
+        <p:spPr>
+          <a:xfrm>
+            <a:off x="5486400" y="6510528"/>
+            <a:ext cx="640080" cy="201168"/>
+          </a:xfrm>
+          <a:prstGeom prst="rect">
+            <a:avLst/>
+          </a:prstGeom>
+          <a:noFill/>
+        </p:spPr>
+        <p:txBody>
+          <a:bodyPr wrap="square" lIns="0" rIns="0" tIns="0" bIns="0" anchor="t">
+            <a:spAutoFit/>
+          </a:bodyPr>
+          <a:lstStyle/>
+          <a:p>
+            <a:pPr algn="ctr"/>
+            <a:r>
+              <a:rPr sz="800" b="1" i="0">
+                <a:solidFill>
+                  <a:srgbClr val="FFFFFF"/>
+                </a:solidFill>
+                <a:latin typeface="Arial"/>
+              </a:rPr>
+              <a:t>독창15</a:t>
+            </a:r>
+          </a:p>
+        </p:txBody>
+      </p:sp>
+      <p:sp>
+        <p:nvSpPr>
+          <p:cNvPr id="113" name="Rectangle 112"/>
+          <p:cNvSpPr/>
+          <p:nvPr/>
+        </p:nvSpPr>
+        <p:spPr>
+          <a:xfrm>
+            <a:off x="7040880" y="6492240"/>
+            <a:ext cx="640080" cy="219456"/>
+          </a:xfrm>
+          <a:prstGeom prst="rect">
+            <a:avLst/>
+          </a:prstGeom>
+          <a:solidFill>
+            <a:srgbClr val="1A1A1A"/>
+          </a:solidFill>
+          <a:ln>
+            <a:noFill/>
+          </a:ln>
+          <a:effectLst/>
+        </p:spPr>
+        <p:style>
+          <a:lnRef idx="1">
+            <a:schemeClr val="accent1"/>
+          </a:lnRef>
+          <a:fillRef idx="3">
+            <a:schemeClr val="accent1"/>
+          </a:fillRef>
+          <a:effectRef idx="2">
+            <a:schemeClr val="accent1"/>
+          </a:effectRef>
+          <a:fontRef idx="minor">
+            <a:schemeClr val="lt1"/>
+          </a:fontRef>
+        </p:style>
+        <p:txBody>
+          <a:bodyPr rtlCol="0" anchor="ctr"/>
+          <a:lstStyle/>
+          <a:p>
+            <a:pPr algn="ctr"/>
+          </a:p>
+        </p:txBody>
+      </p:sp>
+      <p:sp>
+        <p:nvSpPr>
+          <p:cNvPr id="114" name="TextBox 113"/>
+          <p:cNvSpPr txBox="1"/>
+          <p:nvPr/>
+        </p:nvSpPr>
+        <p:spPr>
+          <a:xfrm>
+            <a:off x="7040880" y="6510528"/>
+            <a:ext cx="640080" cy="201168"/>
+          </a:xfrm>
+          <a:prstGeom prst="rect">
+            <a:avLst/>
+          </a:prstGeom>
+          <a:noFill/>
+        </p:spPr>
+        <p:txBody>
+          <a:bodyPr wrap="square" lIns="0" rIns="0" tIns="0" bIns="0" anchor="t">
+            <a:spAutoFit/>
+          </a:bodyPr>
+          <a:lstStyle/>
+          <a:p>
+            <a:pPr algn="ctr"/>
+            <a:r>
+              <a:rPr sz="800" b="1" i="0">
+                <a:solidFill>
+                  <a:srgbClr val="FFFFFF"/>
+                </a:solidFill>
+                <a:latin typeface="Arial"/>
+              </a:rPr>
+              <a:t>완성15</a:t>
+            </a:r>
+          </a:p>
+        </p:txBody>
+      </p:sp>
+      <p:sp>
+        <p:nvSpPr>
+          <p:cNvPr id="115" name="Rectangle 114"/>
+          <p:cNvSpPr/>
+          <p:nvPr/>
+        </p:nvSpPr>
+        <p:spPr>
+          <a:xfrm>
+            <a:off x="8595360" y="6492240"/>
+            <a:ext cx="640080" cy="219456"/>
+          </a:xfrm>
+          <a:prstGeom prst="rect">
+            <a:avLst/>
+          </a:prstGeom>
+          <a:solidFill>
+            <a:srgbClr val="5A5550"/>
+          </a:solidFill>
+          <a:ln>
+            <a:noFill/>
+          </a:ln>
+          <a:effectLst/>
+        </p:spPr>
+        <p:style>
+          <a:lnRef idx="1">
+            <a:schemeClr val="accent1"/>
+          </a:lnRef>
+          <a:fillRef idx="3">
+            <a:schemeClr val="accent1"/>
+          </a:fillRef>
+          <a:effectRef idx="2">
+            <a:schemeClr val="accent1"/>
+          </a:effectRef>
+          <a:fontRef idx="minor">
+            <a:schemeClr val="lt1"/>
+          </a:fontRef>
+        </p:style>
+        <p:txBody>
+          <a:bodyPr rtlCol="0" anchor="ctr"/>
+          <a:lstStyle/>
+          <a:p>
+            <a:pPr algn="ctr"/>
+          </a:p>
+        </p:txBody>
+      </p:sp>
+      <p:sp>
+        <p:nvSpPr>
+          <p:cNvPr id="116" name="TextBox 115"/>
+          <p:cNvSpPr txBox="1"/>
+          <p:nvPr/>
+        </p:nvSpPr>
+        <p:spPr>
+          <a:xfrm>
+            <a:off x="8595360" y="6510528"/>
+            <a:ext cx="640080" cy="201168"/>
+          </a:xfrm>
+          <a:prstGeom prst="rect">
+            <a:avLst/>
+          </a:prstGeom>
+          <a:noFill/>
+        </p:spPr>
+        <p:txBody>
+          <a:bodyPr wrap="square" lIns="0" rIns="0" tIns="0" bIns="0" anchor="t">
+            <a:spAutoFit/>
+          </a:bodyPr>
+          <a:lstStyle/>
+          <a:p>
+            <a:pPr algn="ctr"/>
+            <a:r>
+              <a:rPr sz="800" b="1" i="0">
+                <a:solidFill>
+                  <a:srgbClr val="FFFFFF"/>
+                </a:solidFill>
+                <a:latin typeface="Arial"/>
+              </a:rPr>
+              <a:t>발전20</a:t>
+            </a:r>
+          </a:p>
+        </p:txBody>
+      </p:sp>
+      <p:sp>
+        <p:nvSpPr>
+          <p:cNvPr id="117" name="Rectangle 116"/>
+          <p:cNvSpPr/>
+          <p:nvPr/>
+        </p:nvSpPr>
+        <p:spPr>
+          <a:xfrm>
+            <a:off x="10149840" y="6492240"/>
+            <a:ext cx="640080" cy="219456"/>
+          </a:xfrm>
+          <a:prstGeom prst="rect">
+            <a:avLst/>
+          </a:prstGeom>
+          <a:solidFill>
+            <a:srgbClr val="FEE500"/>
+          </a:solidFill>
+          <a:ln>
+            <a:noFill/>
+          </a:ln>
+          <a:effectLst/>
+        </p:spPr>
+        <p:style>
+          <a:lnRef idx="1">
+            <a:schemeClr val="accent1"/>
+          </a:lnRef>
+          <a:fillRef idx="3">
+            <a:schemeClr val="accent1"/>
+          </a:fillRef>
+          <a:effectRef idx="2">
+            <a:schemeClr val="accent1"/>
+          </a:effectRef>
+          <a:fontRef idx="minor">
+            <a:schemeClr val="lt1"/>
+          </a:fontRef>
+        </p:style>
+        <p:txBody>
+          <a:bodyPr rtlCol="0" anchor="ctr"/>
+          <a:lstStyle/>
+          <a:p>
+            <a:pPr algn="ctr"/>
+          </a:p>
+        </p:txBody>
+      </p:sp>
+      <p:sp>
+        <p:nvSpPr>
+          <p:cNvPr id="118" name="TextBox 117"/>
+          <p:cNvSpPr txBox="1"/>
+          <p:nvPr/>
+        </p:nvSpPr>
+        <p:spPr>
+          <a:xfrm>
+            <a:off x="10149840" y="6510528"/>
+            <a:ext cx="640080" cy="201168"/>
+          </a:xfrm>
+          <a:prstGeom prst="rect">
+            <a:avLst/>
+          </a:prstGeom>
+          <a:noFill/>
+        </p:spPr>
+        <p:txBody>
+          <a:bodyPr wrap="square" lIns="0" rIns="0" tIns="0" bIns="0" anchor="t">
+            <a:spAutoFit/>
+          </a:bodyPr>
+          <a:lstStyle/>
+          <a:p>
+            <a:pPr algn="ctr"/>
+            <a:r>
+              <a:rPr sz="800" b="1" i="0">
+                <a:solidFill>
+                  <a:srgbClr val="1A1A1A"/>
+                </a:solidFill>
+                <a:latin typeface="Arial"/>
+              </a:rPr>
+              <a:t>ESG5</a:t>
             </a:r>
           </a:p>
         </p:txBody>
@@ -27251,7 +29059,7 @@
                 <a:latin typeface="맑은 고딕"/>
               </a:rPr>
               <a:t>서울 폐업 가게 평균 영업기간
-(54.5개월, n=441 상권)</a:t>
+(54.5개월, n=441 상권 · 서울 한정 폐업 모집단)</a:t>
             </a:r>
           </a:p>
         </p:txBody>
@@ -27392,8 +29200,8 @@
                 </a:solidFill>
                 <a:latin typeface="맑은 고딕"/>
               </a:rPr>
-              <a:t>서울 상권 중 정체+축소+쇠퇴 비율
-(2025년 4분기, 신규 진입 위험 신호)</a:t>
+              <a:t>서울 상권 중 정체(35.X%)+축소(18.X%)
+(2025 4분기, 신규 진입 위험 신호)</a:t>
             </a:r>
           </a:p>
         </p:txBody>
@@ -27477,29 +29285,64 @@
         </p:nvSpPr>
         <p:spPr>
           <a:xfrm>
-            <a:off x="6766560" y="6446520"/>
-            <a:ext cx="4937760" cy="228600"/>
-          </a:xfrm>
-          <a:prstGeom prst="rect">
-            <a:avLst/>
-          </a:prstGeom>
-          <a:noFill/>
-        </p:spPr>
-        <p:txBody>
-          <a:bodyPr wrap="square" lIns="0" rIns="0" tIns="0" bIns="0" anchor="t">
-            <a:spAutoFit/>
-          </a:bodyPr>
-          <a:lstStyle/>
-          <a:p>
-            <a:pPr algn="l"/>
-            <a:r>
-              <a:rPr sz="800" b="0" i="1">
+            <a:off x="6766560" y="6400800"/>
+            <a:ext cx="4937760" cy="201168"/>
+          </a:xfrm>
+          <a:prstGeom prst="rect">
+            <a:avLst/>
+          </a:prstGeom>
+          <a:noFill/>
+        </p:spPr>
+        <p:txBody>
+          <a:bodyPr wrap="square" lIns="0" rIns="0" tIns="0" bIns="0" anchor="t">
+            <a:spAutoFit/>
+          </a:bodyPr>
+          <a:lstStyle/>
+          <a:p>
+            <a:pPr algn="l"/>
+            <a:r>
+              <a:rPr sz="750" b="0" i="1">
                 <a:solidFill>
                   <a:srgbClr val="5A5550"/>
                 </a:solidFill>
                 <a:latin typeface="맑은 고딕"/>
               </a:rPr>
-              <a:t>출처: 서울 열린데이터광장 VwsmTrdarIxQq · 2025 4분기 (실측)</a:t>
+              <a:t>출처: 서울 열린데이터광장 VwsmTrdarIxQq · 2025 Q4 · 추출일 2026-04</a:t>
+            </a:r>
+          </a:p>
+        </p:txBody>
+      </p:sp>
+      <p:sp>
+        <p:nvSpPr>
+          <p:cNvPr id="34" name="TextBox 33"/>
+          <p:cNvSpPr txBox="1"/>
+          <p:nvPr/>
+        </p:nvSpPr>
+        <p:spPr>
+          <a:xfrm>
+            <a:off x="6766560" y="6601968"/>
+            <a:ext cx="4937760" cy="201168"/>
+          </a:xfrm>
+          <a:prstGeom prst="rect">
+            <a:avLst/>
+          </a:prstGeom>
+          <a:noFill/>
+        </p:spPr>
+        <p:txBody>
+          <a:bodyPr wrap="square" lIns="0" rIns="0" tIns="0" bIns="0" anchor="t">
+            <a:spAutoFit/>
+          </a:bodyPr>
+          <a:lstStyle/>
+          <a:p>
+            <a:pPr algn="l"/>
+            <a:r>
+              <a:rPr sz="750" b="0" i="1">
+                <a:solidFill>
+                  <a:srgbClr val="5A5550"/>
+                </a:solidFill>
+                <a:latin typeface="맑은 고딕"/>
+              </a:rPr>
+              <a:t>※ KOSIS 자영업 평균 영업기간 3.1년과 차이 = 모집단 정의 (서울 한정+폐업 한정)</a:t>
             </a:r>
           </a:p>
         </p:txBody>
@@ -28618,7 +30461,7 @@
                 </a:solidFill>
                 <a:latin typeface="맑은 고딕"/>
               </a:rPr>
-              <a:t>13,500개 조합 공간에서 stratified sampling으로 300명 추출 + 16개 클러스터로 그룹화 (자체 QA 라운드 1)</a:t>
+              <a:t>13,500 조합 공간 → stratified weighted sampling으로 300명 추출 (95% CI ±5.7%p) + 16 클러스터 (categorical 보정)</a:t>
             </a:r>
           </a:p>
         </p:txBody>
@@ -30542,7 +32385,7 @@
                 </a:solidFill>
                 <a:latin typeface="맑은 고딕"/>
               </a:rPr>
-              <a:t>RAG + 결정론 + GPT-4o</a:t>
+              <a:t>결정론 + SQL+ICP + GPT-4o</a:t>
             </a:r>
           </a:p>
         </p:txBody>
@@ -30577,9 +32420,9 @@
                 </a:solidFill>
                 <a:latin typeface="맑은 고딕"/>
               </a:rPr>
-              <a:t>ChromaDB 벡터검색 + 5-차원
-결정론 진단 + GPT 자유산출의
-3-tier 신뢰 계층</a:t>
+              <a:t>5-차원 결정론 진단 + 보조금
+SQL+ICP 매칭 (active path) +
+ChromaDB 음성/인덱싱 + GPT</a:t>
             </a:r>
           </a:p>
         </p:txBody>
@@ -33854,7 +35697,7 @@
                 </a:solidFill>
                 <a:latin typeface="맑은 고딕"/>
               </a:rPr>
-              <a:t>GPT-4o · ChromaDB RAG · 결정론 룰 엔진의 3-tier 신뢰 계층</a:t>
+              <a:t>결정론 룰 엔진 · SQL+ICP 매칭 · ChromaDB · GPT-4o의 3-tier 신뢰 계층</a:t>
             </a:r>
           </a:p>
         </p:txBody>
@@ -34448,7 +36291,7 @@
                 </a:solidFill>
                 <a:latin typeface="맑은 고딕"/>
               </a:rPr>
-              <a:t>RAG (검색·증강·생성)</a:t>
+              <a:t>보조금 매칭 + 검색</a:t>
             </a:r>
           </a:p>
         </p:txBody>
@@ -34483,8 +36326,8 @@
                 </a:solidFill>
                 <a:latin typeface="맑은 고딕"/>
               </a:rPr>
-              <a:t>ChromaDB PersistentClient + text-embedding-3-small
-→ 보조금 매칭. 의미적 검색 + ICP Learner 시간가중 학습.</a:t>
+              <a:t>Active path: SQL target_regions 필터 + ICP Learner 시간가중 재순위
+ChromaDB PersistentClient: 음성 질의 + 보조금 인덱싱 (Q3 활성 매칭 전환 로드맵)</a:t>
             </a:r>
           </a:p>
         </p:txBody>
@@ -34519,7 +36362,7 @@
                 </a:solidFill>
                 <a:latin typeface="Arial"/>
               </a:rPr>
-              <a:t>✓ 보조금 RAG / ✓ ICP rerank / ✓ 사회적 증거 (k≥10)</a:t>
+              <a:t>✓ SQL+ICP rerank / ✓ ChromaDB 음성·인덱싱 / ✓ k≥10 사회적 증거</a:t>
             </a:r>
           </a:p>
         </p:txBody>
@@ -35270,7 +37113,7 @@
                 </a:solidFill>
                 <a:latin typeface="맑은 고딕"/>
               </a:rPr>
-              <a:t>"AI 코치만 알 수 있는 손실" — 폐업 매트릭스</a:t>
+              <a:t>폐업 매트릭스 — 5신호 결정론 룰의 작동 원리 (개념)</a:t>
             </a:r>
           </a:p>
         </p:txBody>
